--- a/docs/school-light-seminar.pptx
+++ b/docs/school-light-seminar.pptx
@@ -4341,7 +4341,7 @@
               </a:defRPr>
             </a:pPr>
             <a:r>
-              <a:t>Ссылка на репозиторий: ____________________</a:t>
+              <a:t>Репозиторий: github.com/Michunchik/school-light</a:t>
             </a:r>
           </a:p>
         </p:txBody>

--- a/docs/school-light-seminar.pptx
+++ b/docs/school-light-seminar.pptx
@@ -4070,14 +4070,6 @@
 <file path=ppt/slides/slide1.xml><?xml version="1.0" encoding="utf-8"?>
 <p:sld xmlns:a="http://schemas.openxmlformats.org/drawingml/2006/main" xmlns:p="http://schemas.openxmlformats.org/presentationml/2006/main" xmlns:r="http://schemas.openxmlformats.org/officeDocument/2006/relationships">
   <p:cSld>
-    <p:bg>
-      <p:bgPr>
-        <a:solidFill>
-          <a:srgbClr val="1F2A44"/>
-        </a:solidFill>
-        <a:effectLst/>
-      </p:bgPr>
-    </p:bg>
     <p:spTree>
       <p:nvGrpSpPr>
         <p:cNvPr id="1" name=""/>
@@ -4093,8 +4085,8 @@
         </p:nvSpPr>
         <p:spPr>
           <a:xfrm>
-            <a:off x="731520" y="2103120"/>
-            <a:ext cx="10515600" cy="2743200"/>
+            <a:off x="822960" y="1828800"/>
+            <a:ext cx="10515600" cy="1828800"/>
           </a:xfrm>
           <a:prstGeom prst="rect">
             <a:avLst/>
@@ -4110,36 +4102,121 @@
             <a:pPr>
               <a:defRPr sz="4400" b="1">
                 <a:solidFill>
-                  <a:srgbClr val="FFFFFF"/>
-                </a:solidFill>
+                  <a:srgbClr val="222222"/>
+                </a:solidFill>
+                <a:latin typeface="Calibri"/>
               </a:defRPr>
             </a:pPr>
             <a:r>
               <a:t>Вынос вычислений и улучшение действий</a:t>
             </a:r>
           </a:p>
+        </p:txBody>
+      </p:sp>
+      <p:sp>
+        <p:nvSpPr>
+          <p:cNvPr id="3" name="TextBox 2"/>
+          <p:cNvSpPr txBox="1"/>
+          <p:nvPr/>
+        </p:nvSpPr>
+        <p:spPr>
+          <a:xfrm>
+            <a:off x="822960" y="3840480"/>
+            <a:ext cx="10515600" cy="731520"/>
+          </a:xfrm>
+          <a:prstGeom prst="rect">
+            <a:avLst/>
+          </a:prstGeom>
+          <a:noFill/>
+        </p:spPr>
+        <p:txBody>
+          <a:bodyPr wrap="square">
+            <a:spAutoFit/>
+          </a:bodyPr>
+          <a:lstStyle/>
           <a:p>
             <a:pPr>
-              <a:defRPr sz="2400">
-                <a:solidFill>
-                  <a:srgbClr val="C99A2E"/>
-                </a:solidFill>
+              <a:defRPr sz="2400" b="0">
+                <a:solidFill>
+                  <a:srgbClr val="666666"/>
+                </a:solidFill>
+                <a:latin typeface="Calibri"/>
               </a:defRPr>
             </a:pPr>
             <a:r>
               <a:t>на примере учебной версии системы онлайн-школы</a:t>
             </a:r>
           </a:p>
+        </p:txBody>
+      </p:sp>
+      <p:sp>
+        <p:nvSpPr>
+          <p:cNvPr id="4" name="TextBox 3"/>
+          <p:cNvSpPr txBox="1"/>
+          <p:nvPr/>
+        </p:nvSpPr>
+        <p:spPr>
+          <a:xfrm>
+            <a:off x="822960" y="5120640"/>
+            <a:ext cx="10515600" cy="457200"/>
+          </a:xfrm>
+          <a:prstGeom prst="rect">
+            <a:avLst/>
+          </a:prstGeom>
+          <a:noFill/>
+        </p:spPr>
+        <p:txBody>
+          <a:bodyPr wrap="square">
+            <a:spAutoFit/>
+          </a:bodyPr>
+          <a:lstStyle/>
           <a:p>
             <a:pPr>
-              <a:defRPr sz="1800">
-                <a:solidFill>
-                  <a:srgbClr val="DDDDDD"/>
-                </a:solidFill>
-              </a:defRPr>
-            </a:pPr>
-            <a:r>
-              <a:t>Семинар: Технологии функционального программирования</a:t>
+              <a:defRPr sz="1800" b="0">
+                <a:solidFill>
+                  <a:srgbClr val="666666"/>
+                </a:solidFill>
+                <a:latin typeface="Calibri"/>
+              </a:defRPr>
+            </a:pPr>
+            <a:r>
+              <a:t>Технологии функционального программирования, семинар</a:t>
+            </a:r>
+          </a:p>
+        </p:txBody>
+      </p:sp>
+      <p:sp>
+        <p:nvSpPr>
+          <p:cNvPr id="5" name="TextBox 4"/>
+          <p:cNvSpPr txBox="1"/>
+          <p:nvPr/>
+        </p:nvSpPr>
+        <p:spPr>
+          <a:xfrm>
+            <a:off x="822960" y="5577840"/>
+            <a:ext cx="10515600" cy="457200"/>
+          </a:xfrm>
+          <a:prstGeom prst="rect">
+            <a:avLst/>
+          </a:prstGeom>
+          <a:noFill/>
+        </p:spPr>
+        <p:txBody>
+          <a:bodyPr wrap="square">
+            <a:spAutoFit/>
+          </a:bodyPr>
+          <a:lstStyle/>
+          <a:p>
+            <a:pPr>
+              <a:defRPr sz="1800" b="0">
+                <a:solidFill>
+                  <a:srgbClr val="666666"/>
+                </a:solidFill>
+                <a:latin typeface="Calibri"/>
+              </a:defRPr>
+            </a:pPr>
+            <a:r>
+              <a:t>Усов Михаил</a:t>
             </a:r>
           </a:p>
         </p:txBody>
@@ -4155,14 +4232,6 @@
 <file path=ppt/slides/slide10.xml><?xml version="1.0" encoding="utf-8"?>
 <p:sld xmlns:a="http://schemas.openxmlformats.org/drawingml/2006/main" xmlns:p="http://schemas.openxmlformats.org/presentationml/2006/main" xmlns:r="http://schemas.openxmlformats.org/officeDocument/2006/relationships">
   <p:cSld>
-    <p:bg>
-      <p:bgPr>
-        <a:solidFill>
-          <a:srgbClr val="F5F1E8"/>
-        </a:solidFill>
-        <a:effectLst/>
-      </p:bgPr>
-    </p:bg>
     <p:spTree>
       <p:nvGrpSpPr>
         <p:cNvPr id="1" name=""/>
@@ -4178,8 +4247,8 @@
         </p:nvSpPr>
         <p:spPr>
           <a:xfrm>
-            <a:off x="548640" y="320040"/>
-            <a:ext cx="10972800" cy="914400"/>
+            <a:off x="640080" y="365760"/>
+            <a:ext cx="10972800" cy="822960"/>
           </a:xfrm>
           <a:prstGeom prst="rect">
             <a:avLst/>
@@ -4195,8 +4264,9 @@
             <a:pPr>
               <a:defRPr sz="3200" b="1">
                 <a:solidFill>
-                  <a:srgbClr val="1F2A44"/>
-                </a:solidFill>
+                  <a:srgbClr val="222222"/>
+                </a:solidFill>
+                <a:latin typeface="Calibri"/>
               </a:defRPr>
             </a:pPr>
             <a:r>
@@ -4207,24 +4277,449 @@
       </p:sp>
       <p:sp>
         <p:nvSpPr>
-          <p:cNvPr id="3" name="Rectangle 2"/>
+          <p:cNvPr id="3" name="TextBox 2"/>
+          <p:cNvSpPr txBox="1"/>
+          <p:nvPr/>
+        </p:nvSpPr>
+        <p:spPr>
+          <a:xfrm>
+            <a:off x="11155680" y="6355080"/>
+            <a:ext cx="731520" cy="365760"/>
+          </a:xfrm>
+          <a:prstGeom prst="rect">
+            <a:avLst/>
+          </a:prstGeom>
+          <a:noFill/>
+        </p:spPr>
+        <p:txBody>
+          <a:bodyPr wrap="square">
+            <a:spAutoFit/>
+          </a:bodyPr>
+          <a:lstStyle/>
+          <a:p>
+            <a:pPr>
+              <a:defRPr sz="1200" b="0">
+                <a:solidFill>
+                  <a:srgbClr val="666666"/>
+                </a:solidFill>
+                <a:latin typeface="Calibri"/>
+              </a:defRPr>
+            </a:pPr>
+            <a:r>
+              <a:t>10</a:t>
+            </a:r>
+          </a:p>
+        </p:txBody>
+      </p:sp>
+      <p:sp>
+        <p:nvSpPr>
+          <p:cNvPr id="4" name="TextBox 3"/>
+          <p:cNvSpPr txBox="1"/>
+          <p:nvPr/>
+        </p:nvSpPr>
+        <p:spPr>
+          <a:xfrm>
+            <a:off x="640080" y="1463040"/>
+            <a:ext cx="10881360" cy="4572000"/>
+          </a:xfrm>
+          <a:prstGeom prst="rect">
+            <a:avLst/>
+          </a:prstGeom>
+          <a:noFill/>
+        </p:spPr>
+        <p:txBody>
+          <a:bodyPr wrap="square">
+            <a:spAutoFit/>
+          </a:bodyPr>
+          <a:lstStyle/>
+          <a:p>
+            <a:pPr>
+              <a:spcAft>
+                <a:spcPts val="1200"/>
+              </a:spcAft>
+              <a:defRPr sz="2200">
+                <a:solidFill>
+                  <a:srgbClr val="222222"/>
+                </a:solidFill>
+                <a:latin typeface="Calibri"/>
+              </a:defRPr>
+            </a:pPr>
+            <a:r>
+              <a:t>• Коммит 1: исходное состояние (изменяемые объекты, печать в методах)</a:t>
+            </a:r>
+          </a:p>
+          <a:p>
+            <a:pPr>
+              <a:spcAft>
+                <a:spcPts val="1200"/>
+              </a:spcAft>
+              <a:defRPr sz="2200">
+                <a:solidFill>
+                  <a:srgbClr val="222222"/>
+                </a:solidFill>
+                <a:latin typeface="Calibri"/>
+              </a:defRPr>
+            </a:pPr>
+            <a:r>
+              <a:t>• Коммит 2: вынос вычислений в calc.ts, поведение не изменилось</a:t>
+            </a:r>
+          </a:p>
+          <a:p>
+            <a:pPr>
+              <a:spcAft>
+                <a:spcPts val="1200"/>
+              </a:spcAft>
+              <a:defRPr sz="2200">
+                <a:solidFill>
+                  <a:srgbClr val="222222"/>
+                </a:solidFill>
+                <a:latin typeface="Calibri"/>
+              </a:defRPr>
+            </a:pPr>
+            <a:r>
+              <a:t>• Коммит 3: copy-on-write, идентификаторы, конструктор, действия без печати</a:t>
+            </a:r>
+          </a:p>
+          <a:p>
+            <a:pPr>
+              <a:spcAft>
+                <a:spcPts val="1200"/>
+              </a:spcAft>
+              <a:defRPr sz="2200">
+                <a:solidFill>
+                  <a:srgbClr val="222222"/>
+                </a:solidFill>
+                <a:latin typeface="Calibri"/>
+              </a:defRPr>
+            </a:pPr>
+            <a:r>
+              <a:t>• Запуск: npm start, тесты: npm test, типы: npm run check</a:t>
+            </a:r>
+          </a:p>
+          <a:p>
+            <a:pPr>
+              <a:spcAft>
+                <a:spcPts val="1200"/>
+              </a:spcAft>
+              <a:defRPr sz="2200">
+                <a:solidFill>
+                  <a:srgbClr val="222222"/>
+                </a:solidFill>
+                <a:latin typeface="Calibri"/>
+              </a:defRPr>
+            </a:pPr>
+            <a:r>
+              <a:t>• Репозиторий: github.com/Michunchik/school-light</a:t>
+            </a:r>
+          </a:p>
+        </p:txBody>
+      </p:sp>
+    </p:spTree>
+  </p:cSld>
+  <p:clrMapOvr>
+    <a:masterClrMapping/>
+  </p:clrMapOvr>
+</p:sld>
+</file>
+
+<file path=ppt/slides/slide2.xml><?xml version="1.0" encoding="utf-8"?>
+<p:sld xmlns:a="http://schemas.openxmlformats.org/drawingml/2006/main" xmlns:p="http://schemas.openxmlformats.org/presentationml/2006/main" xmlns:r="http://schemas.openxmlformats.org/officeDocument/2006/relationships">
+  <p:cSld>
+    <p:spTree>
+      <p:nvGrpSpPr>
+        <p:cNvPr id="1" name=""/>
+        <p:cNvGrpSpPr/>
+        <p:nvPr/>
+      </p:nvGrpSpPr>
+      <p:grpSpPr/>
+      <p:sp>
+        <p:nvSpPr>
+          <p:cNvPr id="2" name="TextBox 1"/>
+          <p:cNvSpPr txBox="1"/>
+          <p:nvPr/>
+        </p:nvSpPr>
+        <p:spPr>
+          <a:xfrm>
+            <a:off x="640080" y="365760"/>
+            <a:ext cx="10972800" cy="822960"/>
+          </a:xfrm>
+          <a:prstGeom prst="rect">
+            <a:avLst/>
+          </a:prstGeom>
+          <a:noFill/>
+        </p:spPr>
+        <p:txBody>
+          <a:bodyPr wrap="square">
+            <a:spAutoFit/>
+          </a:bodyPr>
+          <a:lstStyle/>
+          <a:p>
+            <a:pPr>
+              <a:defRPr sz="3200" b="1">
+                <a:solidFill>
+                  <a:srgbClr val="222222"/>
+                </a:solidFill>
+                <a:latin typeface="Calibri"/>
+              </a:defRPr>
+            </a:pPr>
+            <a:r>
+              <a:t>О чём программа</a:t>
+            </a:r>
+          </a:p>
+        </p:txBody>
+      </p:sp>
+      <p:sp>
+        <p:nvSpPr>
+          <p:cNvPr id="3" name="TextBox 2"/>
+          <p:cNvSpPr txBox="1"/>
+          <p:nvPr/>
+        </p:nvSpPr>
+        <p:spPr>
+          <a:xfrm>
+            <a:off x="11155680" y="6355080"/>
+            <a:ext cx="731520" cy="365760"/>
+          </a:xfrm>
+          <a:prstGeom prst="rect">
+            <a:avLst/>
+          </a:prstGeom>
+          <a:noFill/>
+        </p:spPr>
+        <p:txBody>
+          <a:bodyPr wrap="square">
+            <a:spAutoFit/>
+          </a:bodyPr>
+          <a:lstStyle/>
+          <a:p>
+            <a:pPr>
+              <a:defRPr sz="1200" b="0">
+                <a:solidFill>
+                  <a:srgbClr val="666666"/>
+                </a:solidFill>
+                <a:latin typeface="Calibri"/>
+              </a:defRPr>
+            </a:pPr>
+            <a:r>
+              <a:t>2</a:t>
+            </a:r>
+          </a:p>
+        </p:txBody>
+      </p:sp>
+      <p:sp>
+        <p:nvSpPr>
+          <p:cNvPr id="4" name="TextBox 3"/>
+          <p:cNvSpPr txBox="1"/>
+          <p:nvPr/>
+        </p:nvSpPr>
+        <p:spPr>
+          <a:xfrm>
+            <a:off x="640080" y="1463040"/>
+            <a:ext cx="10881360" cy="4572000"/>
+          </a:xfrm>
+          <a:prstGeom prst="rect">
+            <a:avLst/>
+          </a:prstGeom>
+          <a:noFill/>
+        </p:spPr>
+        <p:txBody>
+          <a:bodyPr wrap="square">
+            <a:spAutoFit/>
+          </a:bodyPr>
+          <a:lstStyle/>
+          <a:p>
+            <a:pPr>
+              <a:spcAft>
+                <a:spcPts val="1200"/>
+              </a:spcAft>
+              <a:defRPr sz="2200">
+                <a:solidFill>
+                  <a:srgbClr val="222222"/>
+                </a:solidFill>
+                <a:latin typeface="Calibri"/>
+              </a:defRPr>
+            </a:pPr>
+            <a:r>
+              <a:t>• Расписание онлайн-школы: преподаватели ведут занятия с учениками и группами</a:t>
+            </a:r>
+          </a:p>
+          <a:p>
+            <a:pPr>
+              <a:spcAft>
+                <a:spcPts val="1200"/>
+              </a:spcAft>
+              <a:defRPr sz="2200">
+                <a:solidFill>
+                  <a:srgbClr val="222222"/>
+                </a:solidFill>
+                <a:latin typeface="Calibri"/>
+              </a:defRPr>
+            </a:pPr>
+            <a:r>
+              <a:t>• Занятие: время, формат, статус, домашнее задание, признак выплаты</a:t>
+            </a:r>
+          </a:p>
+          <a:p>
+            <a:pPr>
+              <a:spcAft>
+                <a:spcPts val="1200"/>
+              </a:spcAft>
+              <a:defRPr sz="2200">
+                <a:solidFill>
+                  <a:srgbClr val="222222"/>
+                </a:solidFill>
+                <a:latin typeface="Calibri"/>
+              </a:defRPr>
+            </a:pPr>
+            <a:r>
+              <a:t>• Главная задача: посчитать зарплату преподавателя за период</a:t>
+            </a:r>
+          </a:p>
+          <a:p>
+            <a:pPr>
+              <a:spcAft>
+                <a:spcPts val="1200"/>
+              </a:spcAft>
+              <a:defRPr sz="2200">
+                <a:solidFill>
+                  <a:srgbClr val="222222"/>
+                </a:solidFill>
+                <a:latin typeface="Calibri"/>
+              </a:defRPr>
+            </a:pPr>
+            <a:r>
+              <a:t>• Правила взяты из рабочей платформы школы: ставка (своя, потом школы, потом по умолчанию), пробное занятие, отмены</a:t>
+            </a:r>
+          </a:p>
+          <a:p>
+            <a:pPr>
+              <a:spcAft>
+                <a:spcPts val="1200"/>
+              </a:spcAft>
+              <a:defRPr sz="2200">
+                <a:solidFill>
+                  <a:srgbClr val="222222"/>
+                </a:solidFill>
+                <a:latin typeface="Calibri"/>
+              </a:defRPr>
+            </a:pPr>
+            <a:r>
+              <a:t>• Консольная программа, данные только в памяти, TypeScript, около 600 строк</a:t>
+            </a:r>
+          </a:p>
+        </p:txBody>
+      </p:sp>
+    </p:spTree>
+  </p:cSld>
+  <p:clrMapOvr>
+    <a:masterClrMapping/>
+  </p:clrMapOvr>
+</p:sld>
+</file>
+
+<file path=ppt/slides/slide3.xml><?xml version="1.0" encoding="utf-8"?>
+<p:sld xmlns:a="http://schemas.openxmlformats.org/drawingml/2006/main" xmlns:p="http://schemas.openxmlformats.org/presentationml/2006/main" xmlns:r="http://schemas.openxmlformats.org/officeDocument/2006/relationships">
+  <p:cSld>
+    <p:spTree>
+      <p:nvGrpSpPr>
+        <p:cNvPr id="1" name=""/>
+        <p:cNvGrpSpPr/>
+        <p:nvPr/>
+      </p:nvGrpSpPr>
+      <p:grpSpPr/>
+      <p:sp>
+        <p:nvSpPr>
+          <p:cNvPr id="2" name="TextBox 1"/>
+          <p:cNvSpPr txBox="1"/>
+          <p:nvPr/>
+        </p:nvSpPr>
+        <p:spPr>
+          <a:xfrm>
+            <a:off x="640080" y="365760"/>
+            <a:ext cx="10972800" cy="822960"/>
+          </a:xfrm>
+          <a:prstGeom prst="rect">
+            <a:avLst/>
+          </a:prstGeom>
+          <a:noFill/>
+        </p:spPr>
+        <p:txBody>
+          <a:bodyPr wrap="square">
+            <a:spAutoFit/>
+          </a:bodyPr>
+          <a:lstStyle/>
+          <a:p>
+            <a:pPr>
+              <a:defRPr sz="3200" b="1">
+                <a:solidFill>
+                  <a:srgbClr val="222222"/>
+                </a:solidFill>
+                <a:latin typeface="Calibri"/>
+              </a:defRPr>
+            </a:pPr>
+            <a:r>
+              <a:t>Сущности и связи</a:t>
+            </a:r>
+          </a:p>
+        </p:txBody>
+      </p:sp>
+      <p:sp>
+        <p:nvSpPr>
+          <p:cNvPr id="3" name="TextBox 2"/>
+          <p:cNvSpPr txBox="1"/>
+          <p:nvPr/>
+        </p:nvSpPr>
+        <p:spPr>
+          <a:xfrm>
+            <a:off x="11155680" y="6355080"/>
+            <a:ext cx="731520" cy="365760"/>
+          </a:xfrm>
+          <a:prstGeom prst="rect">
+            <a:avLst/>
+          </a:prstGeom>
+          <a:noFill/>
+        </p:spPr>
+        <p:txBody>
+          <a:bodyPr wrap="square">
+            <a:spAutoFit/>
+          </a:bodyPr>
+          <a:lstStyle/>
+          <a:p>
+            <a:pPr>
+              <a:defRPr sz="1200" b="0">
+                <a:solidFill>
+                  <a:srgbClr val="666666"/>
+                </a:solidFill>
+                <a:latin typeface="Calibri"/>
+              </a:defRPr>
+            </a:pPr>
+            <a:r>
+              <a:t>3</a:t>
+            </a:r>
+          </a:p>
+        </p:txBody>
+      </p:sp>
+      <p:sp>
+        <p:nvSpPr>
+          <p:cNvPr id="4" name="Rectangle 3"/>
           <p:cNvSpPr/>
           <p:nvPr/>
         </p:nvSpPr>
         <p:spPr>
           <a:xfrm>
-            <a:off x="548640" y="1188720"/>
-            <a:ext cx="1097280" cy="64008"/>
+            <a:off x="731520" y="1920240"/>
+            <a:ext cx="2468880" cy="1097280"/>
           </a:xfrm>
           <a:prstGeom prst="rect">
             <a:avLst/>
           </a:prstGeom>
           <a:solidFill>
-            <a:srgbClr val="C99A2E"/>
+            <a:srgbClr val="FFFFFF"/>
           </a:solidFill>
-          <a:ln>
-            <a:noFill/>
+          <a:ln w="15875">
+            <a:solidFill>
+              <a:srgbClr val="222222"/>
+            </a:solidFill>
           </a:ln>
+          <a:effectLst/>
         </p:spPr>
         <p:style>
           <a:lnRef idx="1">
@@ -4241,192 +4736,59 @@
           </a:fontRef>
         </p:style>
         <p:txBody>
-          <a:bodyPr rtlCol="0" anchor="ctr"/>
-          <a:lstStyle/>
-          <a:p>
-            <a:pPr algn="ctr"/>
-          </a:p>
-        </p:txBody>
-      </p:sp>
-      <p:sp>
-        <p:nvSpPr>
-          <p:cNvPr id="4" name="TextBox 3"/>
-          <p:cNvSpPr txBox="1"/>
-          <p:nvPr/>
-        </p:nvSpPr>
-        <p:spPr>
-          <a:xfrm>
-            <a:off x="548640" y="1554480"/>
-            <a:ext cx="10972800" cy="4572000"/>
-          </a:xfrm>
-          <a:prstGeom prst="rect">
-            <a:avLst/>
-          </a:prstGeom>
-          <a:noFill/>
-        </p:spPr>
-        <p:txBody>
-          <a:bodyPr wrap="square">
-            <a:spAutoFit/>
-          </a:bodyPr>
-          <a:lstStyle/>
-          <a:p>
-            <a:pPr>
-              <a:spcAft>
-                <a:spcPts val="1000"/>
-              </a:spcAft>
-              <a:defRPr sz="2200">
-                <a:solidFill>
-                  <a:srgbClr val="1F2A44"/>
-                </a:solidFill>
-              </a:defRPr>
-            </a:pPr>
-            <a:r>
-              <a:t>Коммит 1: исходное состояние (изменяемые объекты, печать в методах)</a:t>
-            </a:r>
-          </a:p>
-          <a:p>
-            <a:pPr>
-              <a:spcAft>
-                <a:spcPts val="1000"/>
-              </a:spcAft>
-              <a:defRPr sz="2200">
-                <a:solidFill>
-                  <a:srgbClr val="1F2A44"/>
-                </a:solidFill>
-              </a:defRPr>
-            </a:pPr>
-            <a:r>
-              <a:t>Коммит 2: вынос вычислений в calc.ts, поведение не изменилось</a:t>
-            </a:r>
-          </a:p>
-          <a:p>
-            <a:pPr>
-              <a:spcAft>
-                <a:spcPts val="1000"/>
-              </a:spcAft>
-              <a:defRPr sz="2200">
-                <a:solidFill>
-                  <a:srgbClr val="1F2A44"/>
-                </a:solidFill>
-              </a:defRPr>
-            </a:pPr>
-            <a:r>
-              <a:t>Коммит 3: copy-on-write, идентификаторы, конструктор, действия без печати</a:t>
-            </a:r>
-          </a:p>
-          <a:p>
-            <a:pPr>
-              <a:spcAft>
-                <a:spcPts val="1000"/>
-              </a:spcAft>
-              <a:defRPr sz="2200">
-                <a:solidFill>
-                  <a:srgbClr val="1F2A44"/>
-                </a:solidFill>
-              </a:defRPr>
-            </a:pPr>
-            <a:r>
-              <a:t>Запуск: npm start, проверка: npm test, типы: npm run check</a:t>
-            </a:r>
-          </a:p>
-          <a:p>
-            <a:pPr>
-              <a:spcAft>
-                <a:spcPts val="1000"/>
-              </a:spcAft>
-              <a:defRPr sz="2200">
-                <a:solidFill>
-                  <a:srgbClr val="1F2A44"/>
-                </a:solidFill>
-              </a:defRPr>
-            </a:pPr>
-            <a:r>
-              <a:t>Репозиторий: github.com/Michunchik/school-light</a:t>
-            </a:r>
-          </a:p>
-        </p:txBody>
-      </p:sp>
-    </p:spTree>
-  </p:cSld>
-  <p:clrMapOvr>
-    <a:masterClrMapping/>
-  </p:clrMapOvr>
-</p:sld>
-</file>
-
-<file path=ppt/slides/slide2.xml><?xml version="1.0" encoding="utf-8"?>
-<p:sld xmlns:a="http://schemas.openxmlformats.org/drawingml/2006/main" xmlns:p="http://schemas.openxmlformats.org/presentationml/2006/main" xmlns:r="http://schemas.openxmlformats.org/officeDocument/2006/relationships">
-  <p:cSld>
-    <p:bg>
-      <p:bgPr>
-        <a:solidFill>
-          <a:srgbClr val="F5F1E8"/>
-        </a:solidFill>
-        <a:effectLst/>
-      </p:bgPr>
-    </p:bg>
-    <p:spTree>
-      <p:nvGrpSpPr>
-        <p:cNvPr id="1" name=""/>
-        <p:cNvGrpSpPr/>
-        <p:nvPr/>
-      </p:nvGrpSpPr>
-      <p:grpSpPr/>
-      <p:sp>
-        <p:nvSpPr>
-          <p:cNvPr id="2" name="TextBox 1"/>
-          <p:cNvSpPr txBox="1"/>
-          <p:nvPr/>
-        </p:nvSpPr>
-        <p:spPr>
-          <a:xfrm>
-            <a:off x="548640" y="320040"/>
-            <a:ext cx="10972800" cy="914400"/>
-          </a:xfrm>
-          <a:prstGeom prst="rect">
-            <a:avLst/>
-          </a:prstGeom>
-          <a:noFill/>
-        </p:spPr>
-        <p:txBody>
-          <a:bodyPr wrap="square">
-            <a:spAutoFit/>
-          </a:bodyPr>
-          <a:lstStyle/>
-          <a:p>
-            <a:pPr>
-              <a:defRPr sz="3200" b="1">
-                <a:solidFill>
-                  <a:srgbClr val="1F2A44"/>
-                </a:solidFill>
-              </a:defRPr>
-            </a:pPr>
-            <a:r>
-              <a:t>Исходная программа: о чём она</a:t>
-            </a:r>
-          </a:p>
-        </p:txBody>
-      </p:sp>
-      <p:sp>
-        <p:nvSpPr>
-          <p:cNvPr id="3" name="Rectangle 2"/>
+          <a:bodyPr rtlCol="0" anchor="ctr" wrap="square"/>
+          <a:lstStyle/>
+          <a:p>
+            <a:pPr algn="ctr">
+              <a:defRPr b="1" sz="2000">
+                <a:solidFill>
+                  <a:srgbClr val="222222"/>
+                </a:solidFill>
+                <a:latin typeface="Calibri"/>
+              </a:defRPr>
+            </a:pPr>
+            <a:r>
+              <a:t>Teacher</a:t>
+            </a:r>
+          </a:p>
+          <a:p>
+            <a:pPr algn="ctr">
+              <a:defRPr sz="1400">
+                <a:solidFill>
+                  <a:srgbClr val="666666"/>
+                </a:solidFill>
+                <a:latin typeface="Calibri"/>
+              </a:defRPr>
+            </a:pPr>
+            <a:r>
+              <a:t>имя, свои ставки</a:t>
+            </a:r>
+          </a:p>
+        </p:txBody>
+      </p:sp>
+      <p:sp>
+        <p:nvSpPr>
+          <p:cNvPr id="5" name="Rectangle 4"/>
           <p:cNvSpPr/>
           <p:nvPr/>
         </p:nvSpPr>
         <p:spPr>
           <a:xfrm>
-            <a:off x="548640" y="1188720"/>
-            <a:ext cx="1097280" cy="64008"/>
+            <a:off x="4846320" y="1920240"/>
+            <a:ext cx="2468880" cy="1097280"/>
           </a:xfrm>
           <a:prstGeom prst="rect">
             <a:avLst/>
           </a:prstGeom>
           <a:solidFill>
-            <a:srgbClr val="C99A2E"/>
+            <a:srgbClr val="FFFFFF"/>
           </a:solidFill>
-          <a:ln>
-            <a:noFill/>
+          <a:ln w="15875">
+            <a:solidFill>
+              <a:srgbClr val="222222"/>
+            </a:solidFill>
           </a:ln>
+          <a:effectLst/>
         </p:spPr>
         <p:style>
           <a:lnRef idx="1">
@@ -4443,192 +4805,59 @@
           </a:fontRef>
         </p:style>
         <p:txBody>
-          <a:bodyPr rtlCol="0" anchor="ctr"/>
-          <a:lstStyle/>
-          <a:p>
-            <a:pPr algn="ctr"/>
-          </a:p>
-        </p:txBody>
-      </p:sp>
-      <p:sp>
-        <p:nvSpPr>
-          <p:cNvPr id="4" name="TextBox 3"/>
-          <p:cNvSpPr txBox="1"/>
-          <p:nvPr/>
-        </p:nvSpPr>
-        <p:spPr>
-          <a:xfrm>
-            <a:off x="548640" y="1554480"/>
-            <a:ext cx="10972800" cy="4572000"/>
-          </a:xfrm>
-          <a:prstGeom prst="rect">
-            <a:avLst/>
-          </a:prstGeom>
-          <a:noFill/>
-        </p:spPr>
-        <p:txBody>
-          <a:bodyPr wrap="square">
-            <a:spAutoFit/>
-          </a:bodyPr>
-          <a:lstStyle/>
-          <a:p>
-            <a:pPr>
-              <a:spcAft>
-                <a:spcPts val="1000"/>
-              </a:spcAft>
-              <a:defRPr sz="2200">
-                <a:solidFill>
-                  <a:srgbClr val="1F2A44"/>
-                </a:solidFill>
-              </a:defRPr>
-            </a:pPr>
-            <a:r>
-              <a:t>Расписание онлайн-школы: преподаватели ведут занятия с учениками и группами</a:t>
-            </a:r>
-          </a:p>
-          <a:p>
-            <a:pPr>
-              <a:spcAft>
-                <a:spcPts val="1000"/>
-              </a:spcAft>
-              <a:defRPr sz="2200">
-                <a:solidFill>
-                  <a:srgbClr val="1F2A44"/>
-                </a:solidFill>
-              </a:defRPr>
-            </a:pPr>
-            <a:r>
-              <a:t>Занятие: время, формат, статус, домашнее задание, признак выплаты</a:t>
-            </a:r>
-          </a:p>
-          <a:p>
-            <a:pPr>
-              <a:spcAft>
-                <a:spcPts val="1000"/>
-              </a:spcAft>
-              <a:defRPr sz="2200">
-                <a:solidFill>
-                  <a:srgbClr val="1F2A44"/>
-                </a:solidFill>
-              </a:defRPr>
-            </a:pPr>
-            <a:r>
-              <a:t>Главная задача: посчитать зарплату преподавателя за период</a:t>
-            </a:r>
-          </a:p>
-          <a:p>
-            <a:pPr>
-              <a:spcAft>
-                <a:spcPts val="1000"/>
-              </a:spcAft>
-              <a:defRPr sz="2200">
-                <a:solidFill>
-                  <a:srgbClr val="1F2A44"/>
-                </a:solidFill>
-              </a:defRPr>
-            </a:pPr>
-            <a:r>
-              <a:t>Правила взяты из рабочей платформы школы: ставка (своя, потом школы, потом по умолчанию), пробное занятие, отмены</a:t>
-            </a:r>
-          </a:p>
-          <a:p>
-            <a:pPr>
-              <a:spcAft>
-                <a:spcPts val="1000"/>
-              </a:spcAft>
-              <a:defRPr sz="2200">
-                <a:solidFill>
-                  <a:srgbClr val="1F2A44"/>
-                </a:solidFill>
-              </a:defRPr>
-            </a:pPr>
-            <a:r>
-              <a:t>Консольная программа, все данные в памяти, TypeScript, около 600 строк</a:t>
-            </a:r>
-          </a:p>
-        </p:txBody>
-      </p:sp>
-    </p:spTree>
-  </p:cSld>
-  <p:clrMapOvr>
-    <a:masterClrMapping/>
-  </p:clrMapOvr>
-</p:sld>
-</file>
-
-<file path=ppt/slides/slide3.xml><?xml version="1.0" encoding="utf-8"?>
-<p:sld xmlns:a="http://schemas.openxmlformats.org/drawingml/2006/main" xmlns:p="http://schemas.openxmlformats.org/presentationml/2006/main" xmlns:r="http://schemas.openxmlformats.org/officeDocument/2006/relationships">
-  <p:cSld>
-    <p:bg>
-      <p:bgPr>
-        <a:solidFill>
-          <a:srgbClr val="F5F1E8"/>
-        </a:solidFill>
-        <a:effectLst/>
-      </p:bgPr>
-    </p:bg>
-    <p:spTree>
-      <p:nvGrpSpPr>
-        <p:cNvPr id="1" name=""/>
-        <p:cNvGrpSpPr/>
-        <p:nvPr/>
-      </p:nvGrpSpPr>
-      <p:grpSpPr/>
-      <p:sp>
-        <p:nvSpPr>
-          <p:cNvPr id="2" name="TextBox 1"/>
-          <p:cNvSpPr txBox="1"/>
-          <p:nvPr/>
-        </p:nvSpPr>
-        <p:spPr>
-          <a:xfrm>
-            <a:off x="548640" y="320040"/>
-            <a:ext cx="10972800" cy="914400"/>
-          </a:xfrm>
-          <a:prstGeom prst="rect">
-            <a:avLst/>
-          </a:prstGeom>
-          <a:noFill/>
-        </p:spPr>
-        <p:txBody>
-          <a:bodyPr wrap="square">
-            <a:spAutoFit/>
-          </a:bodyPr>
-          <a:lstStyle/>
-          <a:p>
-            <a:pPr>
-              <a:defRPr sz="3200" b="1">
-                <a:solidFill>
-                  <a:srgbClr val="1F2A44"/>
-                </a:solidFill>
-              </a:defRPr>
-            </a:pPr>
-            <a:r>
-              <a:t>Сущности и связи</a:t>
-            </a:r>
-          </a:p>
-        </p:txBody>
-      </p:sp>
-      <p:sp>
-        <p:nvSpPr>
-          <p:cNvPr id="3" name="Rectangle 2"/>
+          <a:bodyPr rtlCol="0" anchor="ctr" wrap="square"/>
+          <a:lstStyle/>
+          <a:p>
+            <a:pPr algn="ctr">
+              <a:defRPr b="1" sz="2000">
+                <a:solidFill>
+                  <a:srgbClr val="222222"/>
+                </a:solidFill>
+                <a:latin typeface="Calibri"/>
+              </a:defRPr>
+            </a:pPr>
+            <a:r>
+              <a:t>Lesson</a:t>
+            </a:r>
+          </a:p>
+          <a:p>
+            <a:pPr algn="ctr">
+              <a:defRPr sz="1400">
+                <a:solidFill>
+                  <a:srgbClr val="666666"/>
+                </a:solidFill>
+                <a:latin typeface="Calibri"/>
+              </a:defRPr>
+            </a:pPr>
+            <a:r>
+              <a:t>время, формат, статус, ДЗ</a:t>
+            </a:r>
+          </a:p>
+        </p:txBody>
+      </p:sp>
+      <p:sp>
+        <p:nvSpPr>
+          <p:cNvPr id="6" name="Rectangle 5"/>
           <p:cNvSpPr/>
           <p:nvPr/>
         </p:nvSpPr>
         <p:spPr>
           <a:xfrm>
-            <a:off x="548640" y="1188720"/>
-            <a:ext cx="1097280" cy="64008"/>
+            <a:off x="8961120" y="1920240"/>
+            <a:ext cx="2468880" cy="1097280"/>
           </a:xfrm>
           <a:prstGeom prst="rect">
             <a:avLst/>
           </a:prstGeom>
           <a:solidFill>
-            <a:srgbClr val="C99A2E"/>
+            <a:srgbClr val="FFFFFF"/>
           </a:solidFill>
-          <a:ln>
-            <a:noFill/>
+          <a:ln w="15875">
+            <a:solidFill>
+              <a:srgbClr val="222222"/>
+            </a:solidFill>
           </a:ln>
+          <a:effectLst/>
         </p:spPr>
         <p:style>
           <a:lnRef idx="1">
@@ -4645,23 +4874,46 @@
           </a:fontRef>
         </p:style>
         <p:txBody>
-          <a:bodyPr rtlCol="0" anchor="ctr"/>
-          <a:lstStyle/>
-          <a:p>
-            <a:pPr algn="ctr"/>
-          </a:p>
-        </p:txBody>
-      </p:sp>
-      <p:sp>
-        <p:nvSpPr>
-          <p:cNvPr id="4" name="Rectangle 3"/>
+          <a:bodyPr rtlCol="0" anchor="ctr" wrap="square"/>
+          <a:lstStyle/>
+          <a:p>
+            <a:pPr algn="ctr">
+              <a:defRPr b="1" sz="2000">
+                <a:solidFill>
+                  <a:srgbClr val="222222"/>
+                </a:solidFill>
+                <a:latin typeface="Calibri"/>
+              </a:defRPr>
+            </a:pPr>
+            <a:r>
+              <a:t>Student</a:t>
+            </a:r>
+          </a:p>
+          <a:p>
+            <a:pPr algn="ctr">
+              <a:defRPr sz="1400">
+                <a:solidFill>
+                  <a:srgbClr val="666666"/>
+                </a:solidFill>
+                <a:latin typeface="Calibri"/>
+              </a:defRPr>
+            </a:pPr>
+            <a:r>
+              <a:t>имя</a:t>
+            </a:r>
+          </a:p>
+        </p:txBody>
+      </p:sp>
+      <p:sp>
+        <p:nvSpPr>
+          <p:cNvPr id="7" name="Rectangle 6"/>
           <p:cNvSpPr/>
           <p:nvPr/>
         </p:nvSpPr>
         <p:spPr>
           <a:xfrm>
-            <a:off x="731520" y="2011680"/>
-            <a:ext cx="2377440" cy="1188720"/>
+            <a:off x="4846320" y="4114800"/>
+            <a:ext cx="2468880" cy="1097280"/>
           </a:xfrm>
           <a:prstGeom prst="rect">
             <a:avLst/>
@@ -4669,11 +4921,12 @@
           <a:solidFill>
             <a:srgbClr val="FFFFFF"/>
           </a:solidFill>
-          <a:ln w="25400">
+          <a:ln w="15875">
             <a:solidFill>
-              <a:srgbClr val="1F2A44"/>
+              <a:srgbClr val="222222"/>
             </a:solidFill>
           </a:ln>
+          <a:effectLst/>
         </p:spPr>
         <p:style>
           <a:lnRef idx="1">
@@ -4696,38 +4949,40 @@
             <a:pPr algn="ctr">
               <a:defRPr b="1" sz="2000">
                 <a:solidFill>
-                  <a:srgbClr val="1F2A44"/>
-                </a:solidFill>
-              </a:defRPr>
-            </a:pPr>
-            <a:r>
-              <a:t>Teacher</a:t>
+                  <a:srgbClr val="222222"/>
+                </a:solidFill>
+                <a:latin typeface="Calibri"/>
+              </a:defRPr>
+            </a:pPr>
+            <a:r>
+              <a:t>Group</a:t>
             </a:r>
           </a:p>
           <a:p>
             <a:pPr algn="ctr">
-              <a:defRPr sz="1300">
-                <a:solidFill>
-                  <a:srgbClr val="555B6B"/>
-                </a:solidFill>
-              </a:defRPr>
-            </a:pPr>
-            <a:r>
-              <a:t>имя, свои ставки</a:t>
-            </a:r>
-          </a:p>
-        </p:txBody>
-      </p:sp>
-      <p:sp>
-        <p:nvSpPr>
-          <p:cNvPr id="5" name="Rectangle 4"/>
+              <a:defRPr sz="1400">
+                <a:solidFill>
+                  <a:srgbClr val="666666"/>
+                </a:solidFill>
+                <a:latin typeface="Calibri"/>
+              </a:defRPr>
+            </a:pPr>
+            <a:r>
+              <a:t>название, ученики</a:t>
+            </a:r>
+          </a:p>
+        </p:txBody>
+      </p:sp>
+      <p:sp>
+        <p:nvSpPr>
+          <p:cNvPr id="8" name="Rectangle 7"/>
           <p:cNvSpPr/>
           <p:nvPr/>
         </p:nvSpPr>
         <p:spPr>
           <a:xfrm>
-            <a:off x="4754880" y="2011680"/>
-            <a:ext cx="2377440" cy="1188720"/>
+            <a:off x="731520" y="4114800"/>
+            <a:ext cx="2468880" cy="1097280"/>
           </a:xfrm>
           <a:prstGeom prst="rect">
             <a:avLst/>
@@ -4735,11 +4990,12 @@
           <a:solidFill>
             <a:srgbClr val="FFFFFF"/>
           </a:solidFill>
-          <a:ln w="25400">
+          <a:ln w="15875">
             <a:solidFill>
-              <a:srgbClr val="1F2A44"/>
+              <a:srgbClr val="222222"/>
             </a:solidFill>
           </a:ln>
+          <a:effectLst/>
         </p:spPr>
         <p:style>
           <a:lnRef idx="1">
@@ -4762,218 +5018,22 @@
             <a:pPr algn="ctr">
               <a:defRPr b="1" sz="2000">
                 <a:solidFill>
-                  <a:srgbClr val="1F2A44"/>
-                </a:solidFill>
-              </a:defRPr>
-            </a:pPr>
-            <a:r>
-              <a:t>Lesson</a:t>
+                  <a:srgbClr val="222222"/>
+                </a:solidFill>
+                <a:latin typeface="Calibri"/>
+              </a:defRPr>
+            </a:pPr>
+            <a:r>
+              <a:t>School</a:t>
             </a:r>
           </a:p>
           <a:p>
             <a:pPr algn="ctr">
-              <a:defRPr sz="1300">
-                <a:solidFill>
-                  <a:srgbClr val="555B6B"/>
-                </a:solidFill>
-              </a:defRPr>
-            </a:pPr>
-            <a:r>
-              <a:t>время, формат, статус, ДЗ</a:t>
-            </a:r>
-          </a:p>
-        </p:txBody>
-      </p:sp>
-      <p:sp>
-        <p:nvSpPr>
-          <p:cNvPr id="6" name="Rectangle 5"/>
-          <p:cNvSpPr/>
-          <p:nvPr/>
-        </p:nvSpPr>
-        <p:spPr>
-          <a:xfrm>
-            <a:off x="8778240" y="2011680"/>
-            <a:ext cx="2377440" cy="1188720"/>
-          </a:xfrm>
-          <a:prstGeom prst="rect">
-            <a:avLst/>
-          </a:prstGeom>
-          <a:solidFill>
-            <a:srgbClr val="FFFFFF"/>
-          </a:solidFill>
-          <a:ln w="25400">
-            <a:solidFill>
-              <a:srgbClr val="1F2A44"/>
-            </a:solidFill>
-          </a:ln>
-        </p:spPr>
-        <p:style>
-          <a:lnRef idx="1">
-            <a:schemeClr val="accent1"/>
-          </a:lnRef>
-          <a:fillRef idx="3">
-            <a:schemeClr val="accent1"/>
-          </a:fillRef>
-          <a:effectRef idx="2">
-            <a:schemeClr val="accent1"/>
-          </a:effectRef>
-          <a:fontRef idx="minor">
-            <a:schemeClr val="lt1"/>
-          </a:fontRef>
-        </p:style>
-        <p:txBody>
-          <a:bodyPr rtlCol="0" anchor="ctr" wrap="square"/>
-          <a:lstStyle/>
-          <a:p>
-            <a:pPr algn="ctr">
-              <a:defRPr b="1" sz="2000">
-                <a:solidFill>
-                  <a:srgbClr val="1F2A44"/>
-                </a:solidFill>
-              </a:defRPr>
-            </a:pPr>
-            <a:r>
-              <a:t>Student</a:t>
-            </a:r>
-          </a:p>
-          <a:p>
-            <a:pPr algn="ctr">
-              <a:defRPr sz="1300">
-                <a:solidFill>
-                  <a:srgbClr val="555B6B"/>
-                </a:solidFill>
-              </a:defRPr>
-            </a:pPr>
-            <a:r>
-              <a:t>имя</a:t>
-            </a:r>
-          </a:p>
-        </p:txBody>
-      </p:sp>
-      <p:sp>
-        <p:nvSpPr>
-          <p:cNvPr id="7" name="Rectangle 6"/>
-          <p:cNvSpPr/>
-          <p:nvPr/>
-        </p:nvSpPr>
-        <p:spPr>
-          <a:xfrm>
-            <a:off x="4754880" y="4297680"/>
-            <a:ext cx="2377440" cy="1188720"/>
-          </a:xfrm>
-          <a:prstGeom prst="rect">
-            <a:avLst/>
-          </a:prstGeom>
-          <a:solidFill>
-            <a:srgbClr val="FFFFFF"/>
-          </a:solidFill>
-          <a:ln w="25400">
-            <a:solidFill>
-              <a:srgbClr val="1F2A44"/>
-            </a:solidFill>
-          </a:ln>
-        </p:spPr>
-        <p:style>
-          <a:lnRef idx="1">
-            <a:schemeClr val="accent1"/>
-          </a:lnRef>
-          <a:fillRef idx="3">
-            <a:schemeClr val="accent1"/>
-          </a:fillRef>
-          <a:effectRef idx="2">
-            <a:schemeClr val="accent1"/>
-          </a:effectRef>
-          <a:fontRef idx="minor">
-            <a:schemeClr val="lt1"/>
-          </a:fontRef>
-        </p:style>
-        <p:txBody>
-          <a:bodyPr rtlCol="0" anchor="ctr" wrap="square"/>
-          <a:lstStyle/>
-          <a:p>
-            <a:pPr algn="ctr">
-              <a:defRPr b="1" sz="2000">
-                <a:solidFill>
-                  <a:srgbClr val="1F2A44"/>
-                </a:solidFill>
-              </a:defRPr>
-            </a:pPr>
-            <a:r>
-              <a:t>Group</a:t>
-            </a:r>
-          </a:p>
-          <a:p>
-            <a:pPr algn="ctr">
-              <a:defRPr sz="1300">
-                <a:solidFill>
-                  <a:srgbClr val="555B6B"/>
-                </a:solidFill>
-              </a:defRPr>
-            </a:pPr>
-            <a:r>
-              <a:t>название, ученики</a:t>
-            </a:r>
-          </a:p>
-        </p:txBody>
-      </p:sp>
-      <p:sp>
-        <p:nvSpPr>
-          <p:cNvPr id="8" name="Rectangle 7"/>
-          <p:cNvSpPr/>
-          <p:nvPr/>
-        </p:nvSpPr>
-        <p:spPr>
-          <a:xfrm>
-            <a:off x="731520" y="4297680"/>
-            <a:ext cx="2377440" cy="1188720"/>
-          </a:xfrm>
-          <a:prstGeom prst="rect">
-            <a:avLst/>
-          </a:prstGeom>
-          <a:solidFill>
-            <a:srgbClr val="FFFFFF"/>
-          </a:solidFill>
-          <a:ln w="25400">
-            <a:solidFill>
-              <a:srgbClr val="1F2A44"/>
-            </a:solidFill>
-          </a:ln>
-        </p:spPr>
-        <p:style>
-          <a:lnRef idx="1">
-            <a:schemeClr val="accent1"/>
-          </a:lnRef>
-          <a:fillRef idx="3">
-            <a:schemeClr val="accent1"/>
-          </a:fillRef>
-          <a:effectRef idx="2">
-            <a:schemeClr val="accent1"/>
-          </a:effectRef>
-          <a:fontRef idx="minor">
-            <a:schemeClr val="lt1"/>
-          </a:fontRef>
-        </p:style>
-        <p:txBody>
-          <a:bodyPr rtlCol="0" anchor="ctr" wrap="square"/>
-          <a:lstStyle/>
-          <a:p>
-            <a:pPr algn="ctr">
-              <a:defRPr b="1" sz="2000">
-                <a:solidFill>
-                  <a:srgbClr val="1F2A44"/>
-                </a:solidFill>
-              </a:defRPr>
-            </a:pPr>
-            <a:r>
-              <a:t>School</a:t>
-            </a:r>
-          </a:p>
-          <a:p>
-            <a:pPr algn="ctr">
-              <a:defRPr sz="1300">
-                <a:solidFill>
-                  <a:srgbClr val="555B6B"/>
-                </a:solidFill>
+              <a:defRPr sz="1400">
+                <a:solidFill>
+                  <a:srgbClr val="666666"/>
+                </a:solidFill>
+                <a:latin typeface="Calibri"/>
               </a:defRPr>
             </a:pPr>
             <a:r>
@@ -4990,15 +5050,15 @@
         </p:nvCxnSpPr>
         <p:spPr>
           <a:xfrm>
-            <a:off x="3108960" y="2606040"/>
+            <a:off x="3200400" y="2468880"/>
             <a:ext cx="1645920" cy="0"/>
           </a:xfrm>
           <a:prstGeom prst="line">
             <a:avLst/>
           </a:prstGeom>
-          <a:ln w="38100">
+          <a:ln w="19050">
             <a:solidFill>
-              <a:srgbClr val="C99A2E"/>
+              <a:srgbClr val="666666"/>
             </a:solidFill>
           </a:ln>
         </p:spPr>
@@ -5025,15 +5085,15 @@
         </p:nvCxnSpPr>
         <p:spPr>
           <a:xfrm>
-            <a:off x="7132320" y="2606040"/>
+            <a:off x="7315200" y="2468880"/>
             <a:ext cx="1645920" cy="0"/>
           </a:xfrm>
           <a:prstGeom prst="line">
             <a:avLst/>
           </a:prstGeom>
-          <a:ln w="38100">
+          <a:ln w="19050">
             <a:solidFill>
-              <a:srgbClr val="C99A2E"/>
+              <a:srgbClr val="666666"/>
             </a:solidFill>
           </a:ln>
         </p:spPr>
@@ -5060,15 +5120,15 @@
         </p:nvCxnSpPr>
         <p:spPr>
           <a:xfrm>
-            <a:off x="5943600" y="3200400"/>
+            <a:off x="6080760" y="3017520"/>
             <a:ext cx="0" cy="1097280"/>
           </a:xfrm>
           <a:prstGeom prst="line">
             <a:avLst/>
           </a:prstGeom>
-          <a:ln w="38100">
+          <a:ln w="19050">
             <a:solidFill>
-              <a:srgbClr val="C99A2E"/>
+              <a:srgbClr val="666666"/>
             </a:solidFill>
           </a:ln>
         </p:spPr>
@@ -5095,15 +5155,15 @@
         </p:nvCxnSpPr>
         <p:spPr>
           <a:xfrm>
-            <a:off x="3108960" y="4892040"/>
+            <a:off x="3200400" y="4663440"/>
             <a:ext cx="1645920" cy="0"/>
           </a:xfrm>
           <a:prstGeom prst="line">
             <a:avLst/>
           </a:prstGeom>
-          <a:ln w="38100">
+          <a:ln w="19050">
             <a:solidFill>
-              <a:srgbClr val="C99A2E"/>
+              <a:srgbClr val="666666"/>
             </a:solidFill>
           </a:ln>
         </p:spPr>
@@ -5130,8 +5190,8 @@
         </p:nvSpPr>
         <p:spPr>
           <a:xfrm>
-            <a:off x="731520" y="5760720"/>
-            <a:ext cx="10972800" cy="731520"/>
+            <a:off x="731520" y="5669280"/>
+            <a:ext cx="10972800" cy="548640"/>
           </a:xfrm>
           <a:prstGeom prst="rect">
             <a:avLst/>
@@ -5139,20 +5199,21 @@
           <a:noFill/>
         </p:spPr>
         <p:txBody>
-          <a:bodyPr wrap="none">
+          <a:bodyPr wrap="square">
             <a:spAutoFit/>
           </a:bodyPr>
           <a:lstStyle/>
           <a:p>
             <a:pPr>
-              <a:defRPr sz="1600">
-                <a:solidFill>
-                  <a:srgbClr val="555B6B"/>
-                </a:solidFill>
-              </a:defRPr>
-            </a:pPr>
-            <a:r>
-              <a:t>Занятие ведёт один преподаватель и проходит либо с одним учеником, либо с группой. School хранит всех.</a:t>
+              <a:defRPr sz="1600" b="0">
+                <a:solidFill>
+                  <a:srgbClr val="666666"/>
+                </a:solidFill>
+                <a:latin typeface="Calibri"/>
+              </a:defRPr>
+            </a:pPr>
+            <a:r>
+              <a:t>Занятие ведёт один преподаватель, и проходит оно либо с одним учеником, либо с группой. School хранит всех.</a:t>
             </a:r>
           </a:p>
         </p:txBody>
@@ -5168,14 +5229,6 @@
 <file path=ppt/slides/slide4.xml><?xml version="1.0" encoding="utf-8"?>
 <p:sld xmlns:a="http://schemas.openxmlformats.org/drawingml/2006/main" xmlns:p="http://schemas.openxmlformats.org/presentationml/2006/main" xmlns:r="http://schemas.openxmlformats.org/officeDocument/2006/relationships">
   <p:cSld>
-    <p:bg>
-      <p:bgPr>
-        <a:solidFill>
-          <a:srgbClr val="F5F1E8"/>
-        </a:solidFill>
-        <a:effectLst/>
-      </p:bgPr>
-    </p:bg>
     <p:spTree>
       <p:nvGrpSpPr>
         <p:cNvPr id="1" name=""/>
@@ -5191,8 +5244,8 @@
         </p:nvSpPr>
         <p:spPr>
           <a:xfrm>
-            <a:off x="548640" y="320040"/>
-            <a:ext cx="10972800" cy="914400"/>
+            <a:off x="640080" y="365760"/>
+            <a:ext cx="10972800" cy="822960"/>
           </a:xfrm>
           <a:prstGeom prst="rect">
             <a:avLst/>
@@ -5208,8 +5261,9 @@
             <a:pPr>
               <a:defRPr sz="3200" b="1">
                 <a:solidFill>
-                  <a:srgbClr val="1F2A44"/>
-                </a:solidFill>
+                  <a:srgbClr val="222222"/>
+                </a:solidFill>
+                <a:latin typeface="Calibri"/>
               </a:defRPr>
             </a:pPr>
             <a:r>
@@ -5220,24 +5274,276 @@
       </p:sp>
       <p:sp>
         <p:nvSpPr>
-          <p:cNvPr id="3" name="Rectangle 2"/>
+          <p:cNvPr id="3" name="TextBox 2"/>
+          <p:cNvSpPr txBox="1"/>
+          <p:nvPr/>
+        </p:nvSpPr>
+        <p:spPr>
+          <a:xfrm>
+            <a:off x="11155680" y="6355080"/>
+            <a:ext cx="731520" cy="365760"/>
+          </a:xfrm>
+          <a:prstGeom prst="rect">
+            <a:avLst/>
+          </a:prstGeom>
+          <a:noFill/>
+        </p:spPr>
+        <p:txBody>
+          <a:bodyPr wrap="square">
+            <a:spAutoFit/>
+          </a:bodyPr>
+          <a:lstStyle/>
+          <a:p>
+            <a:pPr>
+              <a:defRPr sz="1200" b="0">
+                <a:solidFill>
+                  <a:srgbClr val="666666"/>
+                </a:solidFill>
+                <a:latin typeface="Calibri"/>
+              </a:defRPr>
+            </a:pPr>
+            <a:r>
+              <a:t>4</a:t>
+            </a:r>
+          </a:p>
+        </p:txBody>
+      </p:sp>
+      <p:sp>
+        <p:nvSpPr>
+          <p:cNvPr id="4" name="TextBox 3"/>
+          <p:cNvSpPr txBox="1"/>
+          <p:nvPr/>
+        </p:nvSpPr>
+        <p:spPr>
+          <a:xfrm>
+            <a:off x="640080" y="1463040"/>
+            <a:ext cx="10881360" cy="4572000"/>
+          </a:xfrm>
+          <a:prstGeom prst="rect">
+            <a:avLst/>
+          </a:prstGeom>
+          <a:noFill/>
+        </p:spPr>
+        <p:txBody>
+          <a:bodyPr wrap="square">
+            <a:spAutoFit/>
+          </a:bodyPr>
+          <a:lstStyle/>
+          <a:p>
+            <a:pPr>
+              <a:spcAft>
+                <a:spcPts val="1200"/>
+              </a:spcAft>
+              <a:defRPr sz="2000">
+                <a:solidFill>
+                  <a:srgbClr val="222222"/>
+                </a:solidFill>
+                <a:latin typeface="Calibri"/>
+              </a:defRPr>
+            </a:pPr>
+            <a:r>
+              <a:t>• Операции (13): назначить, перенести, отменить, провести занятие; выдать и выполнить ДЗ; свободные окна; конфликты; зарплата за период; отметить выплату; отчёты по ученику и группе; сводка по школе</a:t>
+            </a:r>
+          </a:p>
+          <a:p>
+            <a:pPr>
+              <a:spcAft>
+                <a:spcPts val="1200"/>
+              </a:spcAft>
+              <a:defRPr sz="2000">
+                <a:solidFill>
+                  <a:srgbClr val="222222"/>
+                </a:solidFill>
+                <a:latin typeface="Calibri"/>
+              </a:defRPr>
+            </a:pPr>
+            <a:r>
+              <a:t>• Скрытые входы: ставки школы и «сегодня» берутся из объекта School, методы читают поля this</a:t>
+            </a:r>
+          </a:p>
+          <a:p>
+            <a:pPr>
+              <a:spcAft>
+                <a:spcPts val="1200"/>
+              </a:spcAft>
+              <a:defRPr sz="2000">
+                <a:solidFill>
+                  <a:srgbClr val="222222"/>
+                </a:solidFill>
+                <a:latin typeface="Calibri"/>
+              </a:defRPr>
+            </a:pPr>
+            <a:r>
+              <a:t>• Скрытые выходы: расчёт зарплаты пишет суммы в занятия, меняет balanceDue и lastReport и печатает в консоль</a:t>
+            </a:r>
+          </a:p>
+          <a:p>
+            <a:pPr>
+              <a:spcAft>
+                <a:spcPts val="1200"/>
+              </a:spcAft>
+              <a:defRPr sz="2000">
+                <a:solidFill>
+                  <a:srgbClr val="222222"/>
+                </a:solidFill>
+                <a:latin typeface="Calibri"/>
+              </a:defRPr>
+            </a:pPr>
+            <a:r>
+              <a:t>• Сводка по школе, вызывая расчёт, попутно печатала отчёты каждого преподавателя</a:t>
+            </a:r>
+          </a:p>
+        </p:txBody>
+      </p:sp>
+    </p:spTree>
+  </p:cSld>
+  <p:clrMapOvr>
+    <a:masterClrMapping/>
+  </p:clrMapOvr>
+</p:sld>
+</file>
+
+<file path=ppt/slides/slide5.xml><?xml version="1.0" encoding="utf-8"?>
+<p:sld xmlns:a="http://schemas.openxmlformats.org/drawingml/2006/main" xmlns:p="http://schemas.openxmlformats.org/presentationml/2006/main" xmlns:r="http://schemas.openxmlformats.org/officeDocument/2006/relationships">
+  <p:cSld>
+    <p:spTree>
+      <p:nvGrpSpPr>
+        <p:cNvPr id="1" name=""/>
+        <p:cNvGrpSpPr/>
+        <p:nvPr/>
+      </p:nvGrpSpPr>
+      <p:grpSpPr/>
+      <p:sp>
+        <p:nvSpPr>
+          <p:cNvPr id="2" name="TextBox 1"/>
+          <p:cNvSpPr txBox="1"/>
+          <p:nvPr/>
+        </p:nvSpPr>
+        <p:spPr>
+          <a:xfrm>
+            <a:off x="640080" y="365760"/>
+            <a:ext cx="10972800" cy="822960"/>
+          </a:xfrm>
+          <a:prstGeom prst="rect">
+            <a:avLst/>
+          </a:prstGeom>
+          <a:noFill/>
+        </p:spPr>
+        <p:txBody>
+          <a:bodyPr wrap="square">
+            <a:spAutoFit/>
+          </a:bodyPr>
+          <a:lstStyle/>
+          <a:p>
+            <a:pPr>
+              <a:defRPr sz="3200" b="1">
+                <a:solidFill>
+                  <a:srgbClr val="222222"/>
+                </a:solidFill>
+                <a:latin typeface="Calibri"/>
+              </a:defRPr>
+            </a:pPr>
+            <a:r>
+              <a:t>Приём 1. Вынос вычислений: было</a:t>
+            </a:r>
+          </a:p>
+        </p:txBody>
+      </p:sp>
+      <p:sp>
+        <p:nvSpPr>
+          <p:cNvPr id="3" name="TextBox 2"/>
+          <p:cNvSpPr txBox="1"/>
+          <p:nvPr/>
+        </p:nvSpPr>
+        <p:spPr>
+          <a:xfrm>
+            <a:off x="11155680" y="6355080"/>
+            <a:ext cx="731520" cy="365760"/>
+          </a:xfrm>
+          <a:prstGeom prst="rect">
+            <a:avLst/>
+          </a:prstGeom>
+          <a:noFill/>
+        </p:spPr>
+        <p:txBody>
+          <a:bodyPr wrap="square">
+            <a:spAutoFit/>
+          </a:bodyPr>
+          <a:lstStyle/>
+          <a:p>
+            <a:pPr>
+              <a:defRPr sz="1200" b="0">
+                <a:solidFill>
+                  <a:srgbClr val="666666"/>
+                </a:solidFill>
+                <a:latin typeface="Calibri"/>
+              </a:defRPr>
+            </a:pPr>
+            <a:r>
+              <a:t>5</a:t>
+            </a:r>
+          </a:p>
+        </p:txBody>
+      </p:sp>
+      <p:sp>
+        <p:nvSpPr>
+          <p:cNvPr id="4" name="TextBox 3"/>
+          <p:cNvSpPr txBox="1"/>
+          <p:nvPr/>
+        </p:nvSpPr>
+        <p:spPr>
+          <a:xfrm>
+            <a:off x="640080" y="1417320"/>
+            <a:ext cx="10881360" cy="365760"/>
+          </a:xfrm>
+          <a:prstGeom prst="rect">
+            <a:avLst/>
+          </a:prstGeom>
+          <a:noFill/>
+        </p:spPr>
+        <p:txBody>
+          <a:bodyPr wrap="square">
+            <a:spAutoFit/>
+          </a:bodyPr>
+          <a:lstStyle/>
+          <a:p>
+            <a:pPr>
+              <a:defRPr sz="1800" b="1">
+                <a:solidFill>
+                  <a:srgbClr val="1F5FA8"/>
+                </a:solidFill>
+                <a:latin typeface="Calibri"/>
+              </a:defRPr>
+            </a:pPr>
+            <a:r>
+              <a:t>Расчёт и действие перемешаны в одном методе</a:t>
+            </a:r>
+          </a:p>
+        </p:txBody>
+      </p:sp>
+      <p:sp>
+        <p:nvSpPr>
+          <p:cNvPr id="5" name="Rectangle 4"/>
           <p:cNvSpPr/>
           <p:nvPr/>
         </p:nvSpPr>
         <p:spPr>
           <a:xfrm>
-            <a:off x="548640" y="1188720"/>
-            <a:ext cx="1097280" cy="64008"/>
+            <a:off x="640080" y="1828800"/>
+            <a:ext cx="10881360" cy="4023360"/>
           </a:xfrm>
           <a:prstGeom prst="rect">
             <a:avLst/>
           </a:prstGeom>
           <a:solidFill>
-            <a:srgbClr val="C99A2E"/>
+            <a:srgbClr val="F2F2F2"/>
           </a:solidFill>
-          <a:ln>
-            <a:noFill/>
+          <a:ln w="9525">
+            <a:solidFill>
+              <a:srgbClr val="BBBBBB"/>
+            </a:solidFill>
           </a:ln>
+          <a:effectLst/>
         </p:spPr>
         <p:style>
           <a:lnRef idx="1">
@@ -5254,92 +5560,188 @@
           </a:fontRef>
         </p:style>
         <p:txBody>
-          <a:bodyPr rtlCol="0" anchor="ctr"/>
-          <a:lstStyle/>
-          <a:p>
-            <a:pPr algn="ctr"/>
-          </a:p>
-        </p:txBody>
-      </p:sp>
-      <p:sp>
-        <p:nvSpPr>
-          <p:cNvPr id="4" name="TextBox 3"/>
-          <p:cNvSpPr txBox="1"/>
-          <p:nvPr/>
-        </p:nvSpPr>
-        <p:spPr>
-          <a:xfrm>
-            <a:off x="548640" y="1554480"/>
-            <a:ext cx="10972800" cy="4572000"/>
-          </a:xfrm>
-          <a:prstGeom prst="rect">
-            <a:avLst/>
-          </a:prstGeom>
-          <a:noFill/>
-        </p:spPr>
-        <p:txBody>
-          <a:bodyPr wrap="square">
-            <a:spAutoFit/>
-          </a:bodyPr>
-          <a:lstStyle/>
-          <a:p>
-            <a:pPr>
-              <a:spcAft>
-                <a:spcPts val="1000"/>
-              </a:spcAft>
-              <a:defRPr sz="2000">
-                <a:solidFill>
-                  <a:srgbClr val="1F2A44"/>
-                </a:solidFill>
-              </a:defRPr>
-            </a:pPr>
-            <a:r>
-              <a:t>Операции (13): назначить, перенести, отменить, провести занятие; выдать и выполнить ДЗ; свободные окна; конфликты; зарплата за период; отметить выплату; отчёты по ученику и группе; сводка по школе</a:t>
-            </a:r>
-          </a:p>
-          <a:p>
-            <a:pPr>
-              <a:spcAft>
-                <a:spcPts val="1000"/>
-              </a:spcAft>
-              <a:defRPr sz="2000">
-                <a:solidFill>
-                  <a:srgbClr val="1F2A44"/>
-                </a:solidFill>
-              </a:defRPr>
-            </a:pPr>
-            <a:r>
-              <a:t>Скрытые входы: ставки школы и «сегодня» берутся из объекта School; методы читают поля this</a:t>
-            </a:r>
-          </a:p>
-          <a:p>
-            <a:pPr>
-              <a:spcAft>
-                <a:spcPts val="1000"/>
-              </a:spcAft>
-              <a:defRPr sz="2000">
-                <a:solidFill>
-                  <a:srgbClr val="1F2A44"/>
-                </a:solidFill>
-              </a:defRPr>
-            </a:pPr>
-            <a:r>
-              <a:t>Скрытые выходы: метод расчёта зарплаты пишет суммы в занятия, меняет balanceDue и lastReport и печатает в консоль</a:t>
-            </a:r>
-          </a:p>
-          <a:p>
-            <a:pPr>
-              <a:spcAft>
-                <a:spcPts val="1000"/>
-              </a:spcAft>
-              <a:defRPr sz="2000">
-                <a:solidFill>
-                  <a:srgbClr val="1F2A44"/>
-                </a:solidFill>
-              </a:defRPr>
-            </a:pPr>
-            <a:r>
-              <a:t>Сводка по школе, вызывая расчёт, попутно печатала отчёты каждого преподавателя</a:t>
+          <a:bodyPr rtlCol="0" anchor="ctr" wrap="square" lIns="137160" rIns="137160" tIns="91440"/>
+          <a:lstStyle/>
+          <a:p>
+            <a:pPr algn="l">
+              <a:defRPr sz="1600">
+                <a:solidFill>
+                  <a:srgbClr val="222222"/>
+                </a:solidFill>
+                <a:latin typeface="Consolas"/>
+              </a:defRPr>
+            </a:pPr>
+            <a:r>
+              <a:t>calculatePayout(from?, to?): number {</a:t>
+            </a:r>
+          </a:p>
+          <a:p>
+            <a:pPr algn="l">
+              <a:defRPr sz="1600">
+                <a:solidFill>
+                  <a:srgbClr val="222222"/>
+                </a:solidFill>
+                <a:latin typeface="Consolas"/>
+              </a:defRPr>
+            </a:pPr>
+            <a:r>
+              <a:t>  const end = to ?? this.school.today;      // скрытый вход</a:t>
+            </a:r>
+          </a:p>
+          <a:p>
+            <a:pPr algn="l">
+              <a:defRPr sz="1600">
+                <a:solidFill>
+                  <a:srgbClr val="222222"/>
+                </a:solidFill>
+                <a:latin typeface="Consolas"/>
+              </a:defRPr>
+            </a:pPr>
+            <a:r>
+              <a:t>  const start = from ?? end.slice(0,7)+'-01';</a:t>
+            </a:r>
+          </a:p>
+          <a:p>
+            <a:pPr algn="l">
+              <a:defRPr sz="1600">
+                <a:solidFill>
+                  <a:srgbClr val="222222"/>
+                </a:solidFill>
+                <a:latin typeface="Consolas"/>
+              </a:defRPr>
+            </a:pPr>
+            <a:r>
+              <a:t>  let total = 0; let unpaid = 0; let count = 0;</a:t>
+            </a:r>
+          </a:p>
+          <a:p>
+            <a:pPr algn="l">
+              <a:defRPr sz="1600">
+                <a:solidFill>
+                  <a:srgbClr val="222222"/>
+                </a:solidFill>
+                <a:latin typeface="Consolas"/>
+              </a:defRPr>
+            </a:pPr>
+            <a:r>
+              <a:t>  for (const lesson of this.lessons) {      // скрытый вход</a:t>
+            </a:r>
+          </a:p>
+          <a:p>
+            <a:pPr algn="l">
+              <a:defRPr sz="1600">
+                <a:solidFill>
+                  <a:srgbClr val="222222"/>
+                </a:solidFill>
+                <a:latin typeface="Consolas"/>
+              </a:defRPr>
+            </a:pPr>
+            <a:r>
+              <a:t>    if (lesson.date &lt; start || lesson.date &gt; end) continue;</a:t>
+            </a:r>
+          </a:p>
+          <a:p>
+            <a:pPr algn="l">
+              <a:defRPr sz="1600">
+                <a:solidFill>
+                  <a:srgbClr val="222222"/>
+                </a:solidFill>
+                <a:latin typeface="Consolas"/>
+              </a:defRPr>
+            </a:pPr>
+            <a:r>
+              <a:t>    this.fillPayout(lesson);                // меняет занятие</a:t>
+            </a:r>
+          </a:p>
+          <a:p>
+            <a:pPr algn="l">
+              <a:defRPr sz="1600">
+                <a:solidFill>
+                  <a:srgbClr val="222222"/>
+                </a:solidFill>
+                <a:latin typeface="Consolas"/>
+              </a:defRPr>
+            </a:pPr>
+            <a:r>
+              <a:t>    if (conducted(lesson)) { total += lesson.payoutAmount; ... }</a:t>
+            </a:r>
+          </a:p>
+          <a:p>
+            <a:pPr algn="l">
+              <a:defRPr sz="1600">
+                <a:solidFill>
+                  <a:srgbClr val="222222"/>
+                </a:solidFill>
+                <a:latin typeface="Consolas"/>
+              </a:defRPr>
+            </a:pPr>
+            <a:r>
+              <a:t>  }</a:t>
+            </a:r>
+          </a:p>
+          <a:p>
+            <a:pPr algn="l">
+              <a:defRPr sz="1600">
+                <a:solidFill>
+                  <a:srgbClr val="222222"/>
+                </a:solidFill>
+                <a:latin typeface="Consolas"/>
+              </a:defRPr>
+            </a:pPr>
+            <a:r>
+              <a:t>  this.balanceDue = unpaid;                 // скрытый выход</a:t>
+            </a:r>
+          </a:p>
+          <a:p>
+            <a:pPr algn="l">
+              <a:defRPr sz="1600">
+                <a:solidFill>
+                  <a:srgbClr val="222222"/>
+                </a:solidFill>
+                <a:latin typeface="Consolas"/>
+              </a:defRPr>
+            </a:pPr>
+            <a:r>
+              <a:t>  this.lastReport = `${this.name}: ...`;    // скрытый выход</a:t>
+            </a:r>
+          </a:p>
+          <a:p>
+            <a:pPr algn="l">
+              <a:defRPr sz="1600">
+                <a:solidFill>
+                  <a:srgbClr val="222222"/>
+                </a:solidFill>
+                <a:latin typeface="Consolas"/>
+              </a:defRPr>
+            </a:pPr>
+            <a:r>
+              <a:t>  console.log(this.lastReport);             // скрытый выход</a:t>
+            </a:r>
+          </a:p>
+          <a:p>
+            <a:pPr algn="l">
+              <a:defRPr sz="1600">
+                <a:solidFill>
+                  <a:srgbClr val="222222"/>
+                </a:solidFill>
+                <a:latin typeface="Consolas"/>
+              </a:defRPr>
+            </a:pPr>
+            <a:r>
+              <a:t>  return total;</a:t>
+            </a:r>
+          </a:p>
+          <a:p>
+            <a:pPr algn="l">
+              <a:defRPr sz="1600">
+                <a:solidFill>
+                  <a:srgbClr val="222222"/>
+                </a:solidFill>
+                <a:latin typeface="Consolas"/>
+              </a:defRPr>
+            </a:pPr>
+            <a:r>
+              <a:t>}</a:t>
             </a:r>
           </a:p>
         </p:txBody>
@@ -5352,17 +5754,9 @@
 </p:sld>
 </file>
 
-<file path=ppt/slides/slide5.xml><?xml version="1.0" encoding="utf-8"?>
+<file path=ppt/slides/slide6.xml><?xml version="1.0" encoding="utf-8"?>
 <p:sld xmlns:a="http://schemas.openxmlformats.org/drawingml/2006/main" xmlns:p="http://schemas.openxmlformats.org/presentationml/2006/main" xmlns:r="http://schemas.openxmlformats.org/officeDocument/2006/relationships">
   <p:cSld>
-    <p:bg>
-      <p:bgPr>
-        <a:solidFill>
-          <a:srgbClr val="F5F1E8"/>
-        </a:solidFill>
-        <a:effectLst/>
-      </p:bgPr>
-    </p:bg>
     <p:spTree>
       <p:nvGrpSpPr>
         <p:cNvPr id="1" name=""/>
@@ -5378,8 +5772,8 @@
         </p:nvSpPr>
         <p:spPr>
           <a:xfrm>
-            <a:off x="548640" y="320040"/>
-            <a:ext cx="10972800" cy="914400"/>
+            <a:off x="640080" y="365760"/>
+            <a:ext cx="10972800" cy="822960"/>
           </a:xfrm>
           <a:prstGeom prst="rect">
             <a:avLst/>
@@ -5395,36 +5789,112 @@
             <a:pPr>
               <a:defRPr sz="3200" b="1">
                 <a:solidFill>
-                  <a:srgbClr val="1F2A44"/>
-                </a:solidFill>
-              </a:defRPr>
-            </a:pPr>
-            <a:r>
-              <a:t>Приём 1. Вынос вычислений: было</a:t>
-            </a:r>
-          </a:p>
-        </p:txBody>
-      </p:sp>
-      <p:sp>
-        <p:nvSpPr>
-          <p:cNvPr id="3" name="Rectangle 2"/>
+                  <a:srgbClr val="222222"/>
+                </a:solidFill>
+                <a:latin typeface="Calibri"/>
+              </a:defRPr>
+            </a:pPr>
+            <a:r>
+              <a:t>Приём 1. Вынос вычислений: стало</a:t>
+            </a:r>
+          </a:p>
+        </p:txBody>
+      </p:sp>
+      <p:sp>
+        <p:nvSpPr>
+          <p:cNvPr id="3" name="TextBox 2"/>
+          <p:cNvSpPr txBox="1"/>
+          <p:nvPr/>
+        </p:nvSpPr>
+        <p:spPr>
+          <a:xfrm>
+            <a:off x="11155680" y="6355080"/>
+            <a:ext cx="731520" cy="365760"/>
+          </a:xfrm>
+          <a:prstGeom prst="rect">
+            <a:avLst/>
+          </a:prstGeom>
+          <a:noFill/>
+        </p:spPr>
+        <p:txBody>
+          <a:bodyPr wrap="square">
+            <a:spAutoFit/>
+          </a:bodyPr>
+          <a:lstStyle/>
+          <a:p>
+            <a:pPr>
+              <a:defRPr sz="1200" b="0">
+                <a:solidFill>
+                  <a:srgbClr val="666666"/>
+                </a:solidFill>
+                <a:latin typeface="Calibri"/>
+              </a:defRPr>
+            </a:pPr>
+            <a:r>
+              <a:t>6</a:t>
+            </a:r>
+          </a:p>
+        </p:txBody>
+      </p:sp>
+      <p:sp>
+        <p:nvSpPr>
+          <p:cNvPr id="4" name="TextBox 3"/>
+          <p:cNvSpPr txBox="1"/>
+          <p:nvPr/>
+        </p:nvSpPr>
+        <p:spPr>
+          <a:xfrm>
+            <a:off x="640080" y="1417320"/>
+            <a:ext cx="6766560" cy="365760"/>
+          </a:xfrm>
+          <a:prstGeom prst="rect">
+            <a:avLst/>
+          </a:prstGeom>
+          <a:noFill/>
+        </p:spPr>
+        <p:txBody>
+          <a:bodyPr wrap="square">
+            <a:spAutoFit/>
+          </a:bodyPr>
+          <a:lstStyle/>
+          <a:p>
+            <a:pPr>
+              <a:defRPr sz="1800" b="1">
+                <a:solidFill>
+                  <a:srgbClr val="1F5FA8"/>
+                </a:solidFill>
+                <a:latin typeface="Calibri"/>
+              </a:defRPr>
+            </a:pPr>
+            <a:r>
+              <a:t>calc.ts: чистая функция</a:t>
+            </a:r>
+          </a:p>
+        </p:txBody>
+      </p:sp>
+      <p:sp>
+        <p:nvSpPr>
+          <p:cNvPr id="5" name="Rectangle 4"/>
           <p:cNvSpPr/>
           <p:nvPr/>
         </p:nvSpPr>
         <p:spPr>
           <a:xfrm>
-            <a:off x="548640" y="1188720"/>
-            <a:ext cx="1097280" cy="64008"/>
+            <a:off x="640080" y="1828800"/>
+            <a:ext cx="6766560" cy="2926080"/>
           </a:xfrm>
           <a:prstGeom prst="rect">
             <a:avLst/>
           </a:prstGeom>
           <a:solidFill>
-            <a:srgbClr val="C99A2E"/>
+            <a:srgbClr val="F2F2F2"/>
           </a:solidFill>
-          <a:ln>
-            <a:noFill/>
+          <a:ln w="9525">
+            <a:solidFill>
+              <a:srgbClr val="BBBBBB"/>
+            </a:solidFill>
           </a:ln>
+          <a:effectLst/>
         </p:spPr>
         <p:style>
           <a:lnRef idx="1">
@@ -5441,23 +5911,124 @@
           </a:fontRef>
         </p:style>
         <p:txBody>
-          <a:bodyPr rtlCol="0" anchor="ctr"/>
-          <a:lstStyle/>
-          <a:p>
-            <a:pPr algn="ctr"/>
-          </a:p>
-        </p:txBody>
-      </p:sp>
-      <p:sp>
-        <p:nvSpPr>
-          <p:cNvPr id="4" name="TextBox 3"/>
+          <a:bodyPr rtlCol="0" anchor="ctr" wrap="square" lIns="137160" rIns="137160" tIns="91440"/>
+          <a:lstStyle/>
+          <a:p>
+            <a:pPr algn="l">
+              <a:defRPr sz="1300">
+                <a:solidFill>
+                  <a:srgbClr val="222222"/>
+                </a:solidFill>
+                <a:latin typeface="Consolas"/>
+              </a:defRPr>
+            </a:pPr>
+            <a:r>
+              <a:t>export function calculateLessonPayout(</a:t>
+            </a:r>
+          </a:p>
+          <a:p>
+            <a:pPr algn="l">
+              <a:defRPr sz="1300">
+                <a:solidFill>
+                  <a:srgbClr val="222222"/>
+                </a:solidFill>
+                <a:latin typeface="Consolas"/>
+              </a:defRPr>
+            </a:pPr>
+            <a:r>
+              <a:t>  lesson: PayableLesson, teacherRates: Rates, schoolRates: Rates</a:t>
+            </a:r>
+          </a:p>
+          <a:p>
+            <a:pPr algn="l">
+              <a:defRPr sz="1300">
+                <a:solidFill>
+                  <a:srgbClr val="222222"/>
+                </a:solidFill>
+                <a:latin typeface="Consolas"/>
+              </a:defRPr>
+            </a:pPr>
+            <a:r>
+              <a:t>): { rate: number; amount: number } {</a:t>
+            </a:r>
+          </a:p>
+          <a:p>
+            <a:pPr algn="l">
+              <a:defRPr sz="1300">
+                <a:solidFill>
+                  <a:srgbClr val="222222"/>
+                </a:solidFill>
+                <a:latin typeface="Consolas"/>
+              </a:defRPr>
+            </a:pPr>
+            <a:r>
+              <a:t>  if (!isActive(lesson.status)) return { rate: 0, amount: 0 };</a:t>
+            </a:r>
+          </a:p>
+          <a:p>
+            <a:pPr algn="l">
+              <a:defRPr sz="1300">
+                <a:solidFill>
+                  <a:srgbClr val="222222"/>
+                </a:solidFill>
+                <a:latin typeface="Consolas"/>
+              </a:defRPr>
+            </a:pPr>
+            <a:r>
+              <a:t>  if (isTrial(lesson)) { const rate = resolveRate('trial', ...); return { rate, amount: rate }; }</a:t>
+            </a:r>
+          </a:p>
+          <a:p>
+            <a:pPr algn="l">
+              <a:defRPr sz="1300">
+                <a:solidFill>
+                  <a:srgbClr val="222222"/>
+                </a:solidFill>
+                <a:latin typeface="Consolas"/>
+              </a:defRPr>
+            </a:pPr>
+            <a:r>
+              <a:t>  const rate = resolveRate(lesson.format, teacherRates, schoolRates);</a:t>
+            </a:r>
+          </a:p>
+          <a:p>
+            <a:pPr algn="l">
+              <a:defRPr sz="1300">
+                <a:solidFill>
+                  <a:srgbClr val="222222"/>
+                </a:solidFill>
+                <a:latin typeface="Consolas"/>
+              </a:defRPr>
+            </a:pPr>
+            <a:r>
+              <a:t>  return { rate, amount: Math.round(hours * rate) };</a:t>
+            </a:r>
+          </a:p>
+          <a:p>
+            <a:pPr algn="l">
+              <a:defRPr sz="1300">
+                <a:solidFill>
+                  <a:srgbClr val="222222"/>
+                </a:solidFill>
+                <a:latin typeface="Consolas"/>
+              </a:defRPr>
+            </a:pPr>
+            <a:r>
+              <a:t>}</a:t>
+            </a:r>
+          </a:p>
+        </p:txBody>
+      </p:sp>
+      <p:sp>
+        <p:nvSpPr>
+          <p:cNvPr id="6" name="TextBox 5"/>
           <p:cNvSpPr txBox="1"/>
           <p:nvPr/>
         </p:nvSpPr>
         <p:spPr>
           <a:xfrm>
-            <a:off x="548640" y="1417320"/>
-            <a:ext cx="11064240" cy="365760"/>
+            <a:off x="7680960" y="1417320"/>
+            <a:ext cx="3931920" cy="365760"/>
           </a:xfrm>
           <a:prstGeom prst="rect">
             <a:avLst/>
@@ -5465,7 +6036,7 @@
           <a:noFill/>
         </p:spPr>
         <p:txBody>
-          <a:bodyPr wrap="none">
+          <a:bodyPr wrap="square">
             <a:spAutoFit/>
           </a:bodyPr>
           <a:lstStyle/>
@@ -5473,38 +6044,40 @@
             <a:pPr>
               <a:defRPr sz="1800" b="1">
                 <a:solidFill>
-                  <a:srgbClr val="B03A2E"/>
-                </a:solidFill>
-              </a:defRPr>
-            </a:pPr>
-            <a:r>
-              <a:t>Расчёт и действие перемешаны в одном методе</a:t>
-            </a:r>
-          </a:p>
-        </p:txBody>
-      </p:sp>
-      <p:sp>
-        <p:nvSpPr>
-          <p:cNvPr id="5" name="Rectangle 4"/>
+                  <a:srgbClr val="1F5FA8"/>
+                </a:solidFill>
+                <a:latin typeface="Calibri"/>
+              </a:defRPr>
+            </a:pPr>
+            <a:r>
+              <a:t>Тест без школы и объектов</a:t>
+            </a:r>
+          </a:p>
+        </p:txBody>
+      </p:sp>
+      <p:sp>
+        <p:nvSpPr>
+          <p:cNvPr id="7" name="Rectangle 6"/>
           <p:cNvSpPr/>
           <p:nvPr/>
         </p:nvSpPr>
         <p:spPr>
           <a:xfrm>
-            <a:off x="548640" y="1828800"/>
-            <a:ext cx="11064240" cy="4206240"/>
+            <a:off x="7680960" y="1828800"/>
+            <a:ext cx="3931920" cy="2926080"/>
           </a:xfrm>
           <a:prstGeom prst="rect">
             <a:avLst/>
           </a:prstGeom>
           <a:solidFill>
-            <a:srgbClr val="FFFFFF"/>
+            <a:srgbClr val="F2F2F2"/>
           </a:solidFill>
-          <a:ln w="19050">
+          <a:ln w="9525">
             <a:solidFill>
-              <a:srgbClr val="B03A2E"/>
+              <a:srgbClr val="BBBBBB"/>
             </a:solidFill>
           </a:ln>
+          <a:effectLst/>
         </p:spPr>
         <p:style>
           <a:lnRef idx="1">
@@ -5525,7 +6098,7 @@
           <a:lstStyle/>
           <a:p>
             <a:pPr algn="l">
-              <a:defRPr sz="1600">
+              <a:defRPr sz="1200">
                 <a:solidFill>
                   <a:srgbClr val="222222"/>
                 </a:solidFill>
@@ -5533,12 +6106,12 @@
               </a:defRPr>
             </a:pPr>
             <a:r>
-              <a:t>calculatePayout(from?, to?): number {</a:t>
+              <a:t>test('выплата: полтора часа по 700', () =&gt; {</a:t>
             </a:r>
           </a:p>
           <a:p>
             <a:pPr algn="l">
-              <a:defRPr sz="1600">
+              <a:defRPr sz="1200">
                 <a:solidFill>
                   <a:srgbClr val="222222"/>
                 </a:solidFill>
@@ -5546,12 +6119,12 @@
               </a:defRPr>
             </a:pPr>
             <a:r>
-              <a:t>  const end = to ?? this.school.today;      // скрытый вход</a:t>
+              <a:t>  assert.deepEqual(</a:t>
             </a:r>
           </a:p>
           <a:p>
             <a:pPr algn="l">
-              <a:defRPr sz="1600">
+              <a:defRPr sz="1200">
                 <a:solidFill>
                   <a:srgbClr val="222222"/>
                 </a:solidFill>
@@ -5559,12 +6132,12 @@
               </a:defRPr>
             </a:pPr>
             <a:r>
-              <a:t>  const start = from ?? end.slice(0,7)+'-01';</a:t>
+              <a:t>    calculateLessonPayout(</a:t>
             </a:r>
           </a:p>
           <a:p>
             <a:pPr algn="l">
-              <a:defRPr sz="1600">
+              <a:defRPr sz="1200">
                 <a:solidFill>
                   <a:srgbClr val="222222"/>
                 </a:solidFill>
@@ -5572,12 +6145,12 @@
               </a:defRPr>
             </a:pPr>
             <a:r>
-              <a:t>  let total = 0; let unpaid = 0; let count = 0;</a:t>
+              <a:t>      lesson({ endTime: '11:30' }),</a:t>
             </a:r>
           </a:p>
           <a:p>
             <a:pPr algn="l">
-              <a:defRPr sz="1600">
+              <a:defRPr sz="1200">
                 <a:solidFill>
                   <a:srgbClr val="222222"/>
                 </a:solidFill>
@@ -5585,12 +6158,12 @@
               </a:defRPr>
             </a:pPr>
             <a:r>
-              <a:t>  for (const lesson of this.lessons) {      // скрытый вход</a:t>
+              <a:t>      {}, { individual: 700 }),</a:t>
             </a:r>
           </a:p>
           <a:p>
             <a:pPr algn="l">
-              <a:defRPr sz="1600">
+              <a:defRPr sz="1200">
                 <a:solidFill>
                   <a:srgbClr val="222222"/>
                 </a:solidFill>
@@ -5598,12 +6171,12 @@
               </a:defRPr>
             </a:pPr>
             <a:r>
-              <a:t>    if (lesson.date &lt; start || lesson.date &gt; end) continue;</a:t>
+              <a:t>    { rate: 700, amount: 1050 });</a:t>
             </a:r>
           </a:p>
           <a:p>
             <a:pPr algn="l">
-              <a:defRPr sz="1600">
+              <a:defRPr sz="1200">
                 <a:solidFill>
                   <a:srgbClr val="222222"/>
                 </a:solidFill>
@@ -5611,98 +6184,78 @@
               </a:defRPr>
             </a:pPr>
             <a:r>
-              <a:t>    this.fillPayout(lesson);                // меняет занятие</a:t>
-            </a:r>
-          </a:p>
-          <a:p>
-            <a:pPr algn="l">
-              <a:defRPr sz="1600">
-                <a:solidFill>
-                  <a:srgbClr val="222222"/>
-                </a:solidFill>
-                <a:latin typeface="Consolas"/>
-              </a:defRPr>
-            </a:pPr>
-            <a:r>
-              <a:t>    if (conducted(lesson)) { total += lesson.payoutAmount; ... }</a:t>
-            </a:r>
-          </a:p>
-          <a:p>
-            <a:pPr algn="l">
-              <a:defRPr sz="1600">
-                <a:solidFill>
-                  <a:srgbClr val="222222"/>
-                </a:solidFill>
-                <a:latin typeface="Consolas"/>
-              </a:defRPr>
-            </a:pPr>
-            <a:r>
-              <a:t>  }</a:t>
-            </a:r>
-          </a:p>
-          <a:p>
-            <a:pPr algn="l">
-              <a:defRPr sz="1600">
-                <a:solidFill>
-                  <a:srgbClr val="222222"/>
-                </a:solidFill>
-                <a:latin typeface="Consolas"/>
-              </a:defRPr>
-            </a:pPr>
-            <a:r>
-              <a:t>  this.balanceDue = unpaid;                 // скрытый выход</a:t>
-            </a:r>
-          </a:p>
-          <a:p>
-            <a:pPr algn="l">
-              <a:defRPr sz="1600">
-                <a:solidFill>
-                  <a:srgbClr val="222222"/>
-                </a:solidFill>
-                <a:latin typeface="Consolas"/>
-              </a:defRPr>
-            </a:pPr>
-            <a:r>
-              <a:t>  this.lastReport = `${this.name}: ...`;    // скрытый выход</a:t>
-            </a:r>
-          </a:p>
-          <a:p>
-            <a:pPr algn="l">
-              <a:defRPr sz="1600">
-                <a:solidFill>
-                  <a:srgbClr val="222222"/>
-                </a:solidFill>
-                <a:latin typeface="Consolas"/>
-              </a:defRPr>
-            </a:pPr>
-            <a:r>
-              <a:t>  console.log(this.lastReport);             // скрытый выход</a:t>
-            </a:r>
-          </a:p>
-          <a:p>
-            <a:pPr algn="l">
-              <a:defRPr sz="1600">
-                <a:solidFill>
-                  <a:srgbClr val="222222"/>
-                </a:solidFill>
-                <a:latin typeface="Consolas"/>
-              </a:defRPr>
-            </a:pPr>
-            <a:r>
-              <a:t>  return total;</a:t>
-            </a:r>
-          </a:p>
-          <a:p>
-            <a:pPr algn="l">
-              <a:defRPr sz="1600">
-                <a:solidFill>
-                  <a:srgbClr val="222222"/>
-                </a:solidFill>
-                <a:latin typeface="Consolas"/>
-              </a:defRPr>
-            </a:pPr>
-            <a:r>
-              <a:t>}</a:t>
+              <a:t>});</a:t>
+            </a:r>
+          </a:p>
+        </p:txBody>
+      </p:sp>
+      <p:sp>
+        <p:nvSpPr>
+          <p:cNvPr id="8" name="TextBox 7"/>
+          <p:cNvSpPr txBox="1"/>
+          <p:nvPr/>
+        </p:nvSpPr>
+        <p:spPr>
+          <a:xfrm>
+            <a:off x="640080" y="5029200"/>
+            <a:ext cx="10881360" cy="1645920"/>
+          </a:xfrm>
+          <a:prstGeom prst="rect">
+            <a:avLst/>
+          </a:prstGeom>
+          <a:noFill/>
+        </p:spPr>
+        <p:txBody>
+          <a:bodyPr wrap="square">
+            <a:spAutoFit/>
+          </a:bodyPr>
+          <a:lstStyle/>
+          <a:p>
+            <a:pPr>
+              <a:spcAft>
+                <a:spcPts val="1200"/>
+              </a:spcAft>
+              <a:defRPr sz="1800">
+                <a:solidFill>
+                  <a:srgbClr val="222222"/>
+                </a:solidFill>
+                <a:latin typeface="Calibri"/>
+              </a:defRPr>
+            </a:pPr>
+            <a:r>
+              <a:t>• Все входы в аргументах, весь результат в return</a:t>
+            </a:r>
+          </a:p>
+          <a:p>
+            <a:pPr>
+              <a:spcAft>
+                <a:spcPts val="1200"/>
+              </a:spcAft>
+              <a:defRPr sz="1800">
+                <a:solidFill>
+                  <a:srgbClr val="222222"/>
+                </a:solidFill>
+                <a:latin typeface="Calibri"/>
+              </a:defRPr>
+            </a:pPr>
+            <a:r>
+              <a:t>• Метод класса стал действием: взять данные из полей, вызвать функцию, применить результат</a:t>
+            </a:r>
+          </a:p>
+          <a:p>
+            <a:pPr>
+              <a:spcAft>
+                <a:spcPts val="1200"/>
+              </a:spcAft>
+              <a:defRPr sz="1800">
+                <a:solidFill>
+                  <a:srgbClr val="222222"/>
+                </a:solidFill>
+                <a:latin typeface="Calibri"/>
+              </a:defRPr>
+            </a:pPr>
+            <a:r>
+              <a:t>• Так же вынесены: ставка, период, итоги, свободные окна, конфликты, тексты отчётов</a:t>
             </a:r>
           </a:p>
         </p:txBody>
@@ -5715,17 +6268,9 @@
 </p:sld>
 </file>
 
-<file path=ppt/slides/slide6.xml><?xml version="1.0" encoding="utf-8"?>
+<file path=ppt/slides/slide7.xml><?xml version="1.0" encoding="utf-8"?>
 <p:sld xmlns:a="http://schemas.openxmlformats.org/drawingml/2006/main" xmlns:p="http://schemas.openxmlformats.org/presentationml/2006/main" xmlns:r="http://schemas.openxmlformats.org/officeDocument/2006/relationships">
   <p:cSld>
-    <p:bg>
-      <p:bgPr>
-        <a:solidFill>
-          <a:srgbClr val="F5F1E8"/>
-        </a:solidFill>
-        <a:effectLst/>
-      </p:bgPr>
-    </p:bg>
     <p:spTree>
       <p:nvGrpSpPr>
         <p:cNvPr id="1" name=""/>
@@ -5741,8 +6286,8 @@
         </p:nvSpPr>
         <p:spPr>
           <a:xfrm>
-            <a:off x="548640" y="320040"/>
-            <a:ext cx="10972800" cy="914400"/>
+            <a:off x="640080" y="365760"/>
+            <a:ext cx="10972800" cy="822960"/>
           </a:xfrm>
           <a:prstGeom prst="rect">
             <a:avLst/>
@@ -5758,36 +6303,112 @@
             <a:pPr>
               <a:defRPr sz="3200" b="1">
                 <a:solidFill>
-                  <a:srgbClr val="1F2A44"/>
-                </a:solidFill>
-              </a:defRPr>
-            </a:pPr>
-            <a:r>
-              <a:t>Приём 1. Вынос вычислений: стало</a:t>
-            </a:r>
-          </a:p>
-        </p:txBody>
-      </p:sp>
-      <p:sp>
-        <p:nvSpPr>
-          <p:cNvPr id="3" name="Rectangle 2"/>
+                  <a:srgbClr val="222222"/>
+                </a:solidFill>
+                <a:latin typeface="Calibri"/>
+              </a:defRPr>
+            </a:pPr>
+            <a:r>
+              <a:t>Приём 2. Copy-on-write</a:t>
+            </a:r>
+          </a:p>
+        </p:txBody>
+      </p:sp>
+      <p:sp>
+        <p:nvSpPr>
+          <p:cNvPr id="3" name="TextBox 2"/>
+          <p:cNvSpPr txBox="1"/>
+          <p:nvPr/>
+        </p:nvSpPr>
+        <p:spPr>
+          <a:xfrm>
+            <a:off x="11155680" y="6355080"/>
+            <a:ext cx="731520" cy="365760"/>
+          </a:xfrm>
+          <a:prstGeom prst="rect">
+            <a:avLst/>
+          </a:prstGeom>
+          <a:noFill/>
+        </p:spPr>
+        <p:txBody>
+          <a:bodyPr wrap="square">
+            <a:spAutoFit/>
+          </a:bodyPr>
+          <a:lstStyle/>
+          <a:p>
+            <a:pPr>
+              <a:defRPr sz="1200" b="0">
+                <a:solidFill>
+                  <a:srgbClr val="666666"/>
+                </a:solidFill>
+                <a:latin typeface="Calibri"/>
+              </a:defRPr>
+            </a:pPr>
+            <a:r>
+              <a:t>7</a:t>
+            </a:r>
+          </a:p>
+        </p:txBody>
+      </p:sp>
+      <p:sp>
+        <p:nvSpPr>
+          <p:cNvPr id="4" name="TextBox 3"/>
+          <p:cNvSpPr txBox="1"/>
+          <p:nvPr/>
+        </p:nvSpPr>
+        <p:spPr>
+          <a:xfrm>
+            <a:off x="640080" y="1417320"/>
+            <a:ext cx="5394960" cy="365760"/>
+          </a:xfrm>
+          <a:prstGeom prst="rect">
+            <a:avLst/>
+          </a:prstGeom>
+          <a:noFill/>
+        </p:spPr>
+        <p:txBody>
+          <a:bodyPr wrap="square">
+            <a:spAutoFit/>
+          </a:bodyPr>
+          <a:lstStyle/>
+          <a:p>
+            <a:pPr>
+              <a:defRPr sz="1800" b="1">
+                <a:solidFill>
+                  <a:srgbClr val="1F5FA8"/>
+                </a:solidFill>
+                <a:latin typeface="Calibri"/>
+              </a:defRPr>
+            </a:pPr>
+            <a:r>
+              <a:t>Было</a:t>
+            </a:r>
+          </a:p>
+        </p:txBody>
+      </p:sp>
+      <p:sp>
+        <p:nvSpPr>
+          <p:cNvPr id="5" name="Rectangle 4"/>
           <p:cNvSpPr/>
           <p:nvPr/>
         </p:nvSpPr>
         <p:spPr>
           <a:xfrm>
-            <a:off x="548640" y="1188720"/>
-            <a:ext cx="1097280" cy="64008"/>
+            <a:off x="640080" y="1828800"/>
+            <a:ext cx="5394960" cy="2286000"/>
           </a:xfrm>
           <a:prstGeom prst="rect">
             <a:avLst/>
           </a:prstGeom>
           <a:solidFill>
-            <a:srgbClr val="C99A2E"/>
+            <a:srgbClr val="F2F2F2"/>
           </a:solidFill>
-          <a:ln>
-            <a:noFill/>
+          <a:ln w="9525">
+            <a:solidFill>
+              <a:srgbClr val="BBBBBB"/>
+            </a:solidFill>
           </a:ln>
+          <a:effectLst/>
         </p:spPr>
         <p:style>
           <a:lnRef idx="1">
@@ -5804,23 +6425,98 @@
           </a:fontRef>
         </p:style>
         <p:txBody>
-          <a:bodyPr rtlCol="0" anchor="ctr"/>
-          <a:lstStyle/>
-          <a:p>
-            <a:pPr algn="ctr"/>
-          </a:p>
-        </p:txBody>
-      </p:sp>
-      <p:sp>
-        <p:nvSpPr>
-          <p:cNvPr id="4" name="TextBox 3"/>
+          <a:bodyPr rtlCol="0" anchor="ctr" wrap="square" lIns="137160" rIns="137160" tIns="91440"/>
+          <a:lstStyle/>
+          <a:p>
+            <a:pPr algn="l">
+              <a:defRPr sz="1400">
+                <a:solidFill>
+                  <a:srgbClr val="222222"/>
+                </a:solidFill>
+                <a:latin typeface="Consolas"/>
+              </a:defRPr>
+            </a:pPr>
+            <a:r>
+              <a:t>rescheduleLesson(lesson, date, start, end) {</a:t>
+            </a:r>
+          </a:p>
+          <a:p>
+            <a:pPr algn="l">
+              <a:defRPr sz="1400">
+                <a:solidFill>
+                  <a:srgbClr val="222222"/>
+                </a:solidFill>
+                <a:latin typeface="Consolas"/>
+              </a:defRPr>
+            </a:pPr>
+            <a:r>
+              <a:t>  ...</a:t>
+            </a:r>
+          </a:p>
+          <a:p>
+            <a:pPr algn="l">
+              <a:defRPr sz="1400">
+                <a:solidFill>
+                  <a:srgbClr val="222222"/>
+                </a:solidFill>
+                <a:latin typeface="Consolas"/>
+              </a:defRPr>
+            </a:pPr>
+            <a:r>
+              <a:t>  lesson.date = date;        // меняем на месте</a:t>
+            </a:r>
+          </a:p>
+          <a:p>
+            <a:pPr algn="l">
+              <a:defRPr sz="1400">
+                <a:solidFill>
+                  <a:srgbClr val="222222"/>
+                </a:solidFill>
+                <a:latin typeface="Consolas"/>
+              </a:defRPr>
+            </a:pPr>
+            <a:r>
+              <a:t>  lesson.startTime = start;  // все, у кого есть</a:t>
+            </a:r>
+          </a:p>
+          <a:p>
+            <a:pPr algn="l">
+              <a:defRPr sz="1400">
+                <a:solidFill>
+                  <a:srgbClr val="222222"/>
+                </a:solidFill>
+                <a:latin typeface="Consolas"/>
+              </a:defRPr>
+            </a:pPr>
+            <a:r>
+              <a:t>  lesson.endTime = end;      // ссылка, видят это</a:t>
+            </a:r>
+          </a:p>
+          <a:p>
+            <a:pPr algn="l">
+              <a:defRPr sz="1400">
+                <a:solidFill>
+                  <a:srgbClr val="222222"/>
+                </a:solidFill>
+                <a:latin typeface="Consolas"/>
+              </a:defRPr>
+            </a:pPr>
+            <a:r>
+              <a:t>}</a:t>
+            </a:r>
+          </a:p>
+        </p:txBody>
+      </p:sp>
+      <p:sp>
+        <p:nvSpPr>
+          <p:cNvPr id="6" name="TextBox 5"/>
           <p:cNvSpPr txBox="1"/>
           <p:nvPr/>
         </p:nvSpPr>
         <p:spPr>
           <a:xfrm>
-            <a:off x="548640" y="1417320"/>
-            <a:ext cx="6766560" cy="365760"/>
+            <a:off x="6309360" y="1417320"/>
+            <a:ext cx="5303520" cy="365760"/>
           </a:xfrm>
           <a:prstGeom prst="rect">
             <a:avLst/>
@@ -5828,7 +6524,7 @@
           <a:noFill/>
         </p:spPr>
         <p:txBody>
-          <a:bodyPr wrap="none">
+          <a:bodyPr wrap="square">
             <a:spAutoFit/>
           </a:bodyPr>
           <a:lstStyle/>
@@ -5836,38 +6532,40 @@
             <a:pPr>
               <a:defRPr sz="1800" b="1">
                 <a:solidFill>
-                  <a:srgbClr val="2E7D4F"/>
-                </a:solidFill>
-              </a:defRPr>
-            </a:pPr>
-            <a:r>
-              <a:t>calc.ts: чистая функция</a:t>
-            </a:r>
-          </a:p>
-        </p:txBody>
-      </p:sp>
-      <p:sp>
-        <p:nvSpPr>
-          <p:cNvPr id="5" name="Rectangle 4"/>
+                  <a:srgbClr val="1F5FA8"/>
+                </a:solidFill>
+                <a:latin typeface="Calibri"/>
+              </a:defRPr>
+            </a:pPr>
+            <a:r>
+              <a:t>Стало</a:t>
+            </a:r>
+          </a:p>
+        </p:txBody>
+      </p:sp>
+      <p:sp>
+        <p:nvSpPr>
+          <p:cNvPr id="7" name="Rectangle 6"/>
           <p:cNvSpPr/>
           <p:nvPr/>
         </p:nvSpPr>
         <p:spPr>
           <a:xfrm>
-            <a:off x="548640" y="1828800"/>
-            <a:ext cx="6766560" cy="2926080"/>
+            <a:off x="6309360" y="1828800"/>
+            <a:ext cx="5303520" cy="2286000"/>
           </a:xfrm>
           <a:prstGeom prst="rect">
             <a:avLst/>
           </a:prstGeom>
           <a:solidFill>
-            <a:srgbClr val="FFFFFF"/>
+            <a:srgbClr val="F2F2F2"/>
           </a:solidFill>
-          <a:ln w="19050">
+          <a:ln w="9525">
             <a:solidFill>
-              <a:srgbClr val="2E7D4F"/>
+              <a:srgbClr val="BBBBBB"/>
             </a:solidFill>
           </a:ln>
+          <a:effectLst/>
         </p:spPr>
         <p:style>
           <a:lnRef idx="1">
@@ -5888,7 +6586,7 @@
           <a:lstStyle/>
           <a:p>
             <a:pPr algn="l">
-              <a:defRPr sz="1300">
+              <a:defRPr sz="1400">
                 <a:solidFill>
                   <a:srgbClr val="222222"/>
                 </a:solidFill>
@@ -5896,12 +6594,12 @@
               </a:defRPr>
             </a:pPr>
             <a:r>
-              <a:t>export function calculateLessonPayout(</a:t>
+              <a:t>// lessons.ts</a:t>
             </a:r>
           </a:p>
           <a:p>
             <a:pPr algn="l">
-              <a:defRPr sz="1300">
+              <a:defRPr sz="1400">
                 <a:solidFill>
                   <a:srgbClr val="222222"/>
                 </a:solidFill>
@@ -5909,12 +6607,12 @@
               </a:defRPr>
             </a:pPr>
             <a:r>
-              <a:t>  lesson: PayableLesson, teacherRates: Rates, schoolRates: Rates</a:t>
+              <a:t>const update = (l, changes) =&gt;</a:t>
             </a:r>
           </a:p>
           <a:p>
             <a:pPr algn="l">
-              <a:defRPr sz="1300">
+              <a:defRPr sz="1400">
                 <a:solidFill>
                   <a:srgbClr val="222222"/>
                 </a:solidFill>
@@ -5922,25 +6620,22 @@
               </a:defRPr>
             </a:pPr>
             <a:r>
-              <a:t>): { rate: number; amount: number } {</a:t>
+              <a:t>  Object.freeze({ ...l, ...changes });</a:t>
             </a:r>
           </a:p>
           <a:p>
             <a:pPr algn="l">
-              <a:defRPr sz="1300">
+              <a:defRPr sz="1400">
                 <a:solidFill>
                   <a:srgbClr val="222222"/>
                 </a:solidFill>
                 <a:latin typeface="Consolas"/>
               </a:defRPr>
             </a:pPr>
-            <a:r>
-              <a:t>  if (!isActive(lesson.status)) return { rate: 0, amount: 0 };</a:t>
-            </a:r>
           </a:p>
           <a:p>
             <a:pPr algn="l">
-              <a:defRPr sz="1300">
+              <a:defRPr sz="1400">
                 <a:solidFill>
                   <a:srgbClr val="222222"/>
                 </a:solidFill>
@@ -5948,12 +6643,12 @@
               </a:defRPr>
             </a:pPr>
             <a:r>
-              <a:t>  if (isTrial(lesson)) { const rate = resolveRate('trial', ...); return { rate, amount: rate }; }</a:t>
+              <a:t>export const reschedule = (l, date, start, end) =&gt;</a:t>
             </a:r>
           </a:p>
           <a:p>
             <a:pPr algn="l">
-              <a:defRPr sz="1300">
+              <a:defRPr sz="1400">
                 <a:solidFill>
                   <a:srgbClr val="222222"/>
                 </a:solidFill>
@@ -5961,47 +6656,21 @@
               </a:defRPr>
             </a:pPr>
             <a:r>
-              <a:t>  const rate = resolveRate(lesson.format, teacherRates, schoolRates);</a:t>
-            </a:r>
-          </a:p>
-          <a:p>
-            <a:pPr algn="l">
-              <a:defRPr sz="1300">
-                <a:solidFill>
-                  <a:srgbClr val="222222"/>
-                </a:solidFill>
-                <a:latin typeface="Consolas"/>
-              </a:defRPr>
-            </a:pPr>
-            <a:r>
-              <a:t>  return { rate, amount: Math.round(hours * rate) };</a:t>
-            </a:r>
-          </a:p>
-          <a:p>
-            <a:pPr algn="l">
-              <a:defRPr sz="1300">
-                <a:solidFill>
-                  <a:srgbClr val="222222"/>
-                </a:solidFill>
-                <a:latin typeface="Consolas"/>
-              </a:defRPr>
-            </a:pPr>
-            <a:r>
-              <a:t>}</a:t>
-            </a:r>
-          </a:p>
-        </p:txBody>
-      </p:sp>
-      <p:sp>
-        <p:nvSpPr>
-          <p:cNvPr id="6" name="TextBox 5"/>
+              <a:t>  update(l, { date, startTime: start, endTime: end });</a:t>
+            </a:r>
+          </a:p>
+        </p:txBody>
+      </p:sp>
+      <p:sp>
+        <p:nvSpPr>
+          <p:cNvPr id="8" name="TextBox 7"/>
           <p:cNvSpPr txBox="1"/>
           <p:nvPr/>
         </p:nvSpPr>
         <p:spPr>
           <a:xfrm>
-            <a:off x="7498079" y="1417320"/>
-            <a:ext cx="4206240" cy="365760"/>
+            <a:off x="640080" y="4480560"/>
+            <a:ext cx="10881360" cy="2103120"/>
           </a:xfrm>
           <a:prstGeom prst="rect">
             <a:avLst/>
@@ -6009,46 +6678,209 @@
           <a:noFill/>
         </p:spPr>
         <p:txBody>
-          <a:bodyPr wrap="none">
+          <a:bodyPr wrap="square">
             <a:spAutoFit/>
           </a:bodyPr>
           <a:lstStyle/>
           <a:p>
             <a:pPr>
+              <a:spcAft>
+                <a:spcPts val="1200"/>
+              </a:spcAft>
+              <a:defRPr sz="1900">
+                <a:solidFill>
+                  <a:srgbClr val="222222"/>
+                </a:solidFill>
+                <a:latin typeface="Calibri"/>
+              </a:defRPr>
+            </a:pPr>
+            <a:r>
+              <a:t>• Занятие неизменяемо: readonly в типах и Object.freeze во время работы</a:t>
+            </a:r>
+          </a:p>
+          <a:p>
+            <a:pPr>
+              <a:spcAft>
+                <a:spcPts val="1200"/>
+              </a:spcAft>
+              <a:defRPr sz="1900">
+                <a:solidFill>
+                  <a:srgbClr val="222222"/>
+                </a:solidFill>
+                <a:latin typeface="Calibri"/>
+              </a:defRPr>
+            </a:pPr>
+            <a:r>
+              <a:t>• Правка возвращает новую версию, старая остаётся прежней (проверено тестом)</a:t>
+            </a:r>
+          </a:p>
+          <a:p>
+            <a:pPr>
+              <a:spcAft>
+                <a:spcPts val="1200"/>
+              </a:spcAft>
+              <a:defRPr sz="1900">
+                <a:solidFill>
+                  <a:srgbClr val="222222"/>
+                </a:solidFill>
+                <a:latin typeface="Calibri"/>
+              </a:defRPr>
+            </a:pPr>
+            <a:r>
+              <a:t>• Один список занятий в School вместо четырёх копий; ссылки на объекты заменены на id</a:t>
+            </a:r>
+          </a:p>
+        </p:txBody>
+      </p:sp>
+    </p:spTree>
+  </p:cSld>
+  <p:clrMapOvr>
+    <a:masterClrMapping/>
+  </p:clrMapOvr>
+</p:sld>
+</file>
+
+<file path=ppt/slides/slide8.xml><?xml version="1.0" encoding="utf-8"?>
+<p:sld xmlns:a="http://schemas.openxmlformats.org/drawingml/2006/main" xmlns:p="http://schemas.openxmlformats.org/presentationml/2006/main" xmlns:r="http://schemas.openxmlformats.org/officeDocument/2006/relationships">
+  <p:cSld>
+    <p:spTree>
+      <p:nvGrpSpPr>
+        <p:cNvPr id="1" name=""/>
+        <p:cNvGrpSpPr/>
+        <p:nvPr/>
+      </p:nvGrpSpPr>
+      <p:grpSpPr/>
+      <p:sp>
+        <p:nvSpPr>
+          <p:cNvPr id="2" name="TextBox 1"/>
+          <p:cNvSpPr txBox="1"/>
+          <p:nvPr/>
+        </p:nvSpPr>
+        <p:spPr>
+          <a:xfrm>
+            <a:off x="640080" y="365760"/>
+            <a:ext cx="10972800" cy="822960"/>
+          </a:xfrm>
+          <a:prstGeom prst="rect">
+            <a:avLst/>
+          </a:prstGeom>
+          <a:noFill/>
+        </p:spPr>
+        <p:txBody>
+          <a:bodyPr wrap="square">
+            <a:spAutoFit/>
+          </a:bodyPr>
+          <a:lstStyle/>
+          <a:p>
+            <a:pPr>
+              <a:defRPr sz="3200" b="1">
+                <a:solidFill>
+                  <a:srgbClr val="222222"/>
+                </a:solidFill>
+                <a:latin typeface="Calibri"/>
+              </a:defRPr>
+            </a:pPr>
+            <a:r>
+              <a:t>Сигнатуры, конструктор, обобщение</a:t>
+            </a:r>
+          </a:p>
+        </p:txBody>
+      </p:sp>
+      <p:sp>
+        <p:nvSpPr>
+          <p:cNvPr id="3" name="TextBox 2"/>
+          <p:cNvSpPr txBox="1"/>
+          <p:nvPr/>
+        </p:nvSpPr>
+        <p:spPr>
+          <a:xfrm>
+            <a:off x="11155680" y="6355080"/>
+            <a:ext cx="731520" cy="365760"/>
+          </a:xfrm>
+          <a:prstGeom prst="rect">
+            <a:avLst/>
+          </a:prstGeom>
+          <a:noFill/>
+        </p:spPr>
+        <p:txBody>
+          <a:bodyPr wrap="square">
+            <a:spAutoFit/>
+          </a:bodyPr>
+          <a:lstStyle/>
+          <a:p>
+            <a:pPr>
+              <a:defRPr sz="1200" b="0">
+                <a:solidFill>
+                  <a:srgbClr val="666666"/>
+                </a:solidFill>
+                <a:latin typeface="Calibri"/>
+              </a:defRPr>
+            </a:pPr>
+            <a:r>
+              <a:t>8</a:t>
+            </a:r>
+          </a:p>
+        </p:txBody>
+      </p:sp>
+      <p:sp>
+        <p:nvSpPr>
+          <p:cNvPr id="4" name="TextBox 3"/>
+          <p:cNvSpPr txBox="1"/>
+          <p:nvPr/>
+        </p:nvSpPr>
+        <p:spPr>
+          <a:xfrm>
+            <a:off x="640080" y="1417320"/>
+            <a:ext cx="5394960" cy="365760"/>
+          </a:xfrm>
+          <a:prstGeom prst="rect">
+            <a:avLst/>
+          </a:prstGeom>
+          <a:noFill/>
+        </p:spPr>
+        <p:txBody>
+          <a:bodyPr wrap="square">
+            <a:spAutoFit/>
+          </a:bodyPr>
+          <a:lstStyle/>
+          <a:p>
+            <a:pPr>
               <a:defRPr sz="1800" b="1">
                 <a:solidFill>
-                  <a:srgbClr val="2E7D4F"/>
-                </a:solidFill>
-              </a:defRPr>
-            </a:pPr>
-            <a:r>
-              <a:t>Тест без школы и объектов</a:t>
-            </a:r>
-          </a:p>
-        </p:txBody>
-      </p:sp>
-      <p:sp>
-        <p:nvSpPr>
-          <p:cNvPr id="7" name="Rectangle 6"/>
+                  <a:srgbClr val="1F5FA8"/>
+                </a:solidFill>
+                <a:latin typeface="Calibri"/>
+              </a:defRPr>
+            </a:pPr>
+            <a:r>
+              <a:t>Было: 10 позиционных аргументов</a:t>
+            </a:r>
+          </a:p>
+        </p:txBody>
+      </p:sp>
+      <p:sp>
+        <p:nvSpPr>
+          <p:cNvPr id="5" name="Rectangle 4"/>
           <p:cNvSpPr/>
           <p:nvPr/>
         </p:nvSpPr>
         <p:spPr>
           <a:xfrm>
-            <a:off x="7498079" y="1828800"/>
-            <a:ext cx="4206240" cy="2377440"/>
+            <a:off x="640080" y="1828800"/>
+            <a:ext cx="5394960" cy="1097280"/>
           </a:xfrm>
           <a:prstGeom prst="rect">
             <a:avLst/>
           </a:prstGeom>
           <a:solidFill>
-            <a:srgbClr val="FFFFFF"/>
+            <a:srgbClr val="F2F2F2"/>
           </a:solidFill>
-          <a:ln w="19050">
+          <a:ln w="9525">
             <a:solidFill>
-              <a:srgbClr val="2E7D4F"/>
+              <a:srgbClr val="BBBBBB"/>
             </a:solidFill>
           </a:ln>
+          <a:effectLst/>
         </p:spPr>
         <p:style>
           <a:lnRef idx="1">
@@ -6069,7 +6901,7 @@
           <a:lstStyle/>
           <a:p>
             <a:pPr algn="l">
-              <a:defRPr sz="1200">
+              <a:defRPr sz="1400">
                 <a:solidFill>
                   <a:srgbClr val="222222"/>
                 </a:solidFill>
@@ -6077,12 +6909,12 @@
               </a:defRPr>
             </a:pPr>
             <a:r>
-              <a:t>test('выплата: полтора часа по 700', () =&gt; {</a:t>
+              <a:t>new Lesson(id, teacher, student, group,</a:t>
             </a:r>
           </a:p>
           <a:p>
             <a:pPr algn="l">
-              <a:defRPr sz="1200">
+              <a:defRPr sz="1400">
                 <a:solidFill>
                   <a:srgbClr val="222222"/>
                 </a:solidFill>
@@ -6090,60 +6922,21 @@
               </a:defRPr>
             </a:pPr>
             <a:r>
-              <a:t>  assert.deepEqual(</a:t>
-            </a:r>
-          </a:p>
-          <a:p>
-            <a:pPr algn="l">
-              <a:defRPr sz="1200">
-                <a:solidFill>
-                  <a:srgbClr val="222222"/>
-                </a:solidFill>
-                <a:latin typeface="Consolas"/>
-              </a:defRPr>
-            </a:pPr>
-            <a:r>
-              <a:t>    calculateLessonPayout(lesson({ endTime: '11:30' }), {}, { individual: 700 }),</a:t>
-            </a:r>
-          </a:p>
-          <a:p>
-            <a:pPr algn="l">
-              <a:defRPr sz="1200">
-                <a:solidFill>
-                  <a:srgbClr val="222222"/>
-                </a:solidFill>
-                <a:latin typeface="Consolas"/>
-              </a:defRPr>
-            </a:pPr>
-            <a:r>
-              <a:t>    { rate: 700, amount: 1050 });</a:t>
-            </a:r>
-          </a:p>
-          <a:p>
-            <a:pPr algn="l">
-              <a:defRPr sz="1200">
-                <a:solidFill>
-                  <a:srgbClr val="222222"/>
-                </a:solidFill>
-                <a:latin typeface="Consolas"/>
-              </a:defRPr>
-            </a:pPr>
-            <a:r>
-              <a:t>});</a:t>
-            </a:r>
-          </a:p>
-        </p:txBody>
-      </p:sp>
-      <p:sp>
-        <p:nvSpPr>
-          <p:cNvPr id="8" name="TextBox 7"/>
+              <a:t>  date, start, end, format, subject, topic)</a:t>
+            </a:r>
+          </a:p>
+        </p:txBody>
+      </p:sp>
+      <p:sp>
+        <p:nvSpPr>
+          <p:cNvPr id="6" name="TextBox 5"/>
           <p:cNvSpPr txBox="1"/>
           <p:nvPr/>
         </p:nvSpPr>
         <p:spPr>
           <a:xfrm>
-            <a:off x="548640" y="4937760"/>
-            <a:ext cx="10972800" cy="1737360"/>
+            <a:off x="6309360" y="1417320"/>
+            <a:ext cx="5303520" cy="365760"/>
           </a:xfrm>
           <a:prstGeom prst="rect">
             <a:avLst/>
@@ -6157,132 +6950,42 @@
           <a:lstStyle/>
           <a:p>
             <a:pPr>
-              <a:spcAft>
-                <a:spcPts val="1000"/>
-              </a:spcAft>
-              <a:defRPr sz="1800">
-                <a:solidFill>
-                  <a:srgbClr val="1F2A44"/>
-                </a:solidFill>
-              </a:defRPr>
-            </a:pPr>
-            <a:r>
-              <a:t>Все входы в аргументах, весь результат в return</a:t>
-            </a:r>
-          </a:p>
-          <a:p>
-            <a:pPr>
-              <a:spcAft>
-                <a:spcPts val="1000"/>
-              </a:spcAft>
-              <a:defRPr sz="1800">
-                <a:solidFill>
-                  <a:srgbClr val="1F2A44"/>
-                </a:solidFill>
-              </a:defRPr>
-            </a:pPr>
-            <a:r>
-              <a:t>Метод класса стал действием: взять данные из полей, вызвать функцию, применить результат</a:t>
-            </a:r>
-          </a:p>
-          <a:p>
-            <a:pPr>
-              <a:spcAft>
-                <a:spcPts val="1000"/>
-              </a:spcAft>
-              <a:defRPr sz="1800">
-                <a:solidFill>
-                  <a:srgbClr val="1F2A44"/>
-                </a:solidFill>
-              </a:defRPr>
-            </a:pPr>
-            <a:r>
-              <a:t>Так же вынесены: ставка, период, итоги, свободные окна, конфликты, тексты отчётов</a:t>
-            </a:r>
-          </a:p>
-        </p:txBody>
-      </p:sp>
-    </p:spTree>
-  </p:cSld>
-  <p:clrMapOvr>
-    <a:masterClrMapping/>
-  </p:clrMapOvr>
-</p:sld>
-</file>
-
-<file path=ppt/slides/slide7.xml><?xml version="1.0" encoding="utf-8"?>
-<p:sld xmlns:a="http://schemas.openxmlformats.org/drawingml/2006/main" xmlns:p="http://schemas.openxmlformats.org/presentationml/2006/main" xmlns:r="http://schemas.openxmlformats.org/officeDocument/2006/relationships">
-  <p:cSld>
-    <p:bg>
-      <p:bgPr>
-        <a:solidFill>
-          <a:srgbClr val="F5F1E8"/>
-        </a:solidFill>
-        <a:effectLst/>
-      </p:bgPr>
-    </p:bg>
-    <p:spTree>
-      <p:nvGrpSpPr>
-        <p:cNvPr id="1" name=""/>
-        <p:cNvGrpSpPr/>
-        <p:nvPr/>
-      </p:nvGrpSpPr>
-      <p:grpSpPr/>
-      <p:sp>
-        <p:nvSpPr>
-          <p:cNvPr id="2" name="TextBox 1"/>
-          <p:cNvSpPr txBox="1"/>
-          <p:nvPr/>
-        </p:nvSpPr>
-        <p:spPr>
-          <a:xfrm>
-            <a:off x="548640" y="320040"/>
-            <a:ext cx="10972800" cy="914400"/>
-          </a:xfrm>
-          <a:prstGeom prst="rect">
-            <a:avLst/>
-          </a:prstGeom>
-          <a:noFill/>
-        </p:spPr>
-        <p:txBody>
-          <a:bodyPr wrap="square">
-            <a:spAutoFit/>
-          </a:bodyPr>
-          <a:lstStyle/>
-          <a:p>
-            <a:pPr>
-              <a:defRPr sz="3200" b="1">
-                <a:solidFill>
-                  <a:srgbClr val="1F2A44"/>
-                </a:solidFill>
-              </a:defRPr>
-            </a:pPr>
-            <a:r>
-              <a:t>Приём 2. Улучшение действий: copy-on-write</a:t>
-            </a:r>
-          </a:p>
-        </p:txBody>
-      </p:sp>
-      <p:sp>
-        <p:nvSpPr>
-          <p:cNvPr id="3" name="Rectangle 2"/>
+              <a:defRPr sz="1800" b="1">
+                <a:solidFill>
+                  <a:srgbClr val="1F5FA8"/>
+                </a:solidFill>
+                <a:latin typeface="Calibri"/>
+              </a:defRPr>
+            </a:pPr>
+            <a:r>
+              <a:t>Стало: один объект с именами</a:t>
+            </a:r>
+          </a:p>
+        </p:txBody>
+      </p:sp>
+      <p:sp>
+        <p:nvSpPr>
+          <p:cNvPr id="7" name="Rectangle 6"/>
           <p:cNvSpPr/>
           <p:nvPr/>
         </p:nvSpPr>
         <p:spPr>
           <a:xfrm>
-            <a:off x="548640" y="1188720"/>
-            <a:ext cx="1097280" cy="64008"/>
+            <a:off x="6309360" y="1828800"/>
+            <a:ext cx="5303520" cy="1280160"/>
           </a:xfrm>
           <a:prstGeom prst="rect">
             <a:avLst/>
           </a:prstGeom>
           <a:solidFill>
-            <a:srgbClr val="C99A2E"/>
+            <a:srgbClr val="F2F2F2"/>
           </a:solidFill>
-          <a:ln>
-            <a:noFill/>
+          <a:ln w="9525">
+            <a:solidFill>
+              <a:srgbClr val="BBBBBB"/>
+            </a:solidFill>
           </a:ln>
+          <a:effectLst/>
         </p:spPr>
         <p:style>
           <a:lnRef idx="1">
@@ -6299,23 +7002,59 @@
           </a:fontRef>
         </p:style>
         <p:txBody>
-          <a:bodyPr rtlCol="0" anchor="ctr"/>
-          <a:lstStyle/>
-          <a:p>
-            <a:pPr algn="ctr"/>
-          </a:p>
-        </p:txBody>
-      </p:sp>
-      <p:sp>
-        <p:nvSpPr>
-          <p:cNvPr id="4" name="TextBox 3"/>
+          <a:bodyPr rtlCol="0" anchor="ctr" wrap="square" lIns="137160" rIns="137160" tIns="91440"/>
+          <a:lstStyle/>
+          <a:p>
+            <a:pPr algn="l">
+              <a:defRPr sz="1400">
+                <a:solidFill>
+                  <a:srgbClr val="222222"/>
+                </a:solidFill>
+                <a:latin typeface="Consolas"/>
+              </a:defRPr>
+            </a:pPr>
+            <a:r>
+              <a:t>createLesson(id, {</a:t>
+            </a:r>
+          </a:p>
+          <a:p>
+            <a:pPr algn="l">
+              <a:defRPr sz="1400">
+                <a:solidFill>
+                  <a:srgbClr val="222222"/>
+                </a:solidFill>
+                <a:latin typeface="Consolas"/>
+              </a:defRPr>
+            </a:pPr>
+            <a:r>
+              <a:t>  teacherId, studentId, date,</a:t>
+            </a:r>
+          </a:p>
+          <a:p>
+            <a:pPr algn="l">
+              <a:defRPr sz="1400">
+                <a:solidFill>
+                  <a:srgbClr val="222222"/>
+                </a:solidFill>
+                <a:latin typeface="Consolas"/>
+              </a:defRPr>
+            </a:pPr>
+            <a:r>
+              <a:t>  startTime, endTime, format, subject })</a:t>
+            </a:r>
+          </a:p>
+        </p:txBody>
+      </p:sp>
+      <p:sp>
+        <p:nvSpPr>
+          <p:cNvPr id="8" name="TextBox 7"/>
           <p:cNvSpPr txBox="1"/>
           <p:nvPr/>
         </p:nvSpPr>
         <p:spPr>
           <a:xfrm>
-            <a:off x="548640" y="1417320"/>
-            <a:ext cx="5394960" cy="365760"/>
+            <a:off x="640080" y="3520439"/>
+            <a:ext cx="10972800" cy="365760"/>
           </a:xfrm>
           <a:prstGeom prst="rect">
             <a:avLst/>
@@ -6323,7 +7062,7 @@
           <a:noFill/>
         </p:spPr>
         <p:txBody>
-          <a:bodyPr wrap="none">
+          <a:bodyPr wrap="square">
             <a:spAutoFit/>
           </a:bodyPr>
           <a:lstStyle/>
@@ -6331,38 +7070,40 @@
             <a:pPr>
               <a:defRPr sz="1800" b="1">
                 <a:solidFill>
-                  <a:srgbClr val="B03A2E"/>
-                </a:solidFill>
-              </a:defRPr>
-            </a:pPr>
-            <a:r>
-              <a:t>Было</a:t>
-            </a:r>
-          </a:p>
-        </p:txBody>
-      </p:sp>
-      <p:sp>
-        <p:nvSpPr>
-          <p:cNvPr id="5" name="Rectangle 4"/>
+                  <a:srgbClr val="1F5FA8"/>
+                </a:solidFill>
+                <a:latin typeface="Calibri"/>
+              </a:defRPr>
+            </a:pPr>
+            <a:r>
+              <a:t>Обобщение: любая правка занятия это функция «было → стало»</a:t>
+            </a:r>
+          </a:p>
+        </p:txBody>
+      </p:sp>
+      <p:sp>
+        <p:nvSpPr>
+          <p:cNvPr id="9" name="Rectangle 8"/>
           <p:cNvSpPr/>
           <p:nvPr/>
         </p:nvSpPr>
         <p:spPr>
           <a:xfrm>
-            <a:off x="548640" y="1828800"/>
-            <a:ext cx="5394960" cy="2377440"/>
+            <a:off x="640080" y="3931920"/>
+            <a:ext cx="10972800" cy="1645920"/>
           </a:xfrm>
           <a:prstGeom prst="rect">
             <a:avLst/>
           </a:prstGeom>
           <a:solidFill>
-            <a:srgbClr val="FFFFFF"/>
+            <a:srgbClr val="F2F2F2"/>
           </a:solidFill>
-          <a:ln w="19050">
+          <a:ln w="9525">
             <a:solidFill>
-              <a:srgbClr val="B03A2E"/>
+              <a:srgbClr val="BBBBBB"/>
             </a:solidFill>
           </a:ln>
+          <a:effectLst/>
         </p:spPr>
         <p:style>
           <a:lnRef idx="1">
@@ -6391,7 +7132,7 @@
               </a:defRPr>
             </a:pPr>
             <a:r>
-              <a:t>rescheduleLesson(lesson, date, start, end) {</a:t>
+              <a:t>cancelLesson(id)  { return this.change(id, ops.cancel); }</a:t>
             </a:r>
           </a:p>
           <a:p>
@@ -6404,7 +7145,7 @@
               </a:defRPr>
             </a:pPr>
             <a:r>
-              <a:t>  ...</a:t>
+              <a:t>conductLesson(id) { return this.change(id, ops.conduct); }</a:t>
             </a:r>
           </a:p>
           <a:p>
@@ -6417,7 +7158,7 @@
               </a:defRPr>
             </a:pPr>
             <a:r>
-              <a:t>  lesson.date = date;          // меняем объект на месте</a:t>
+              <a:t>private change(id, edit: (l) =&gt; Lesson) {</a:t>
             </a:r>
           </a:p>
           <a:p>
@@ -6430,7 +7171,7 @@
               </a:defRPr>
             </a:pPr>
             <a:r>
-              <a:t>  lesson.startTime = start;    // все, кто держит ссылку, видят изменение</a:t>
+              <a:t>  return this.apply(edit(this.lesson(id)));</a:t>
             </a:r>
           </a:p>
           <a:p>
@@ -6443,19 +7184,6 @@
               </a:defRPr>
             </a:pPr>
             <a:r>
-              <a:t>  lesson.endTime = end;</a:t>
-            </a:r>
-          </a:p>
-          <a:p>
-            <a:pPr algn="l">
-              <a:defRPr sz="1400">
-                <a:solidFill>
-                  <a:srgbClr val="222222"/>
-                </a:solidFill>
-                <a:latin typeface="Consolas"/>
-              </a:defRPr>
-            </a:pPr>
-            <a:r>
               <a:t>}</a:t>
             </a:r>
           </a:p>
@@ -6463,14 +7191,14 @@
       </p:sp>
       <p:sp>
         <p:nvSpPr>
-          <p:cNvPr id="6" name="TextBox 5"/>
+          <p:cNvPr id="10" name="TextBox 9"/>
           <p:cNvSpPr txBox="1"/>
           <p:nvPr/>
         </p:nvSpPr>
         <p:spPr>
           <a:xfrm>
-            <a:off x="6217920" y="1417320"/>
-            <a:ext cx="5486400" cy="365760"/>
+            <a:off x="640080" y="5852160"/>
+            <a:ext cx="10972800" cy="548640"/>
           </a:xfrm>
           <a:prstGeom prst="rect">
             <a:avLst/>
@@ -6478,704 +7206,17 @@
           <a:noFill/>
         </p:spPr>
         <p:txBody>
-          <a:bodyPr wrap="none">
-            <a:spAutoFit/>
-          </a:bodyPr>
-          <a:lstStyle/>
-          <a:p>
-            <a:pPr>
-              <a:defRPr sz="1800" b="1">
-                <a:solidFill>
-                  <a:srgbClr val="2E7D4F"/>
-                </a:solidFill>
-              </a:defRPr>
-            </a:pPr>
-            <a:r>
-              <a:t>Стало</a:t>
-            </a:r>
-          </a:p>
-        </p:txBody>
-      </p:sp>
-      <p:sp>
-        <p:nvSpPr>
-          <p:cNvPr id="7" name="Rectangle 6"/>
-          <p:cNvSpPr/>
-          <p:nvPr/>
-        </p:nvSpPr>
-        <p:spPr>
-          <a:xfrm>
-            <a:off x="6217920" y="1828800"/>
-            <a:ext cx="5486400" cy="2377440"/>
-          </a:xfrm>
-          <a:prstGeom prst="rect">
-            <a:avLst/>
-          </a:prstGeom>
-          <a:solidFill>
-            <a:srgbClr val="FFFFFF"/>
-          </a:solidFill>
-          <a:ln w="19050">
-            <a:solidFill>
-              <a:srgbClr val="2E7D4F"/>
-            </a:solidFill>
-          </a:ln>
-        </p:spPr>
-        <p:style>
-          <a:lnRef idx="1">
-            <a:schemeClr val="accent1"/>
-          </a:lnRef>
-          <a:fillRef idx="3">
-            <a:schemeClr val="accent1"/>
-          </a:fillRef>
-          <a:effectRef idx="2">
-            <a:schemeClr val="accent1"/>
-          </a:effectRef>
-          <a:fontRef idx="minor">
-            <a:schemeClr val="lt1"/>
-          </a:fontRef>
-        </p:style>
-        <p:txBody>
-          <a:bodyPr rtlCol="0" anchor="ctr" wrap="square" lIns="137160" rIns="137160" tIns="91440"/>
-          <a:lstStyle/>
-          <a:p>
-            <a:pPr algn="l">
-              <a:defRPr sz="1400">
-                <a:solidFill>
-                  <a:srgbClr val="222222"/>
-                </a:solidFill>
-                <a:latin typeface="Consolas"/>
-              </a:defRPr>
-            </a:pPr>
-            <a:r>
-              <a:t>// lessons.ts</a:t>
-            </a:r>
-          </a:p>
-          <a:p>
-            <a:pPr algn="l">
-              <a:defRPr sz="1400">
-                <a:solidFill>
-                  <a:srgbClr val="222222"/>
-                </a:solidFill>
-                <a:latin typeface="Consolas"/>
-              </a:defRPr>
-            </a:pPr>
-            <a:r>
-              <a:t>const update = (l, changes) =&gt;</a:t>
-            </a:r>
-          </a:p>
-          <a:p>
-            <a:pPr algn="l">
-              <a:defRPr sz="1400">
-                <a:solidFill>
-                  <a:srgbClr val="222222"/>
-                </a:solidFill>
-                <a:latin typeface="Consolas"/>
-              </a:defRPr>
-            </a:pPr>
-            <a:r>
-              <a:t>  Object.freeze({ ...l, ...changes });</a:t>
-            </a:r>
-          </a:p>
-          <a:p>
-            <a:pPr algn="l">
-              <a:defRPr sz="1400">
-                <a:solidFill>
-                  <a:srgbClr val="222222"/>
-                </a:solidFill>
-                <a:latin typeface="Consolas"/>
-              </a:defRPr>
-            </a:pPr>
-          </a:p>
-          <a:p>
-            <a:pPr algn="l">
-              <a:defRPr sz="1400">
-                <a:solidFill>
-                  <a:srgbClr val="222222"/>
-                </a:solidFill>
-                <a:latin typeface="Consolas"/>
-              </a:defRPr>
-            </a:pPr>
-            <a:r>
-              <a:t>export const reschedule = (l, date, start, end) =&gt;</a:t>
-            </a:r>
-          </a:p>
-          <a:p>
-            <a:pPr algn="l">
-              <a:defRPr sz="1400">
-                <a:solidFill>
-                  <a:srgbClr val="222222"/>
-                </a:solidFill>
-                <a:latin typeface="Consolas"/>
-              </a:defRPr>
-            </a:pPr>
-            <a:r>
-              <a:t>  update(l, { date, startTime: start, endTime: end });</a:t>
-            </a:r>
-          </a:p>
-        </p:txBody>
-      </p:sp>
-      <p:sp>
-        <p:nvSpPr>
-          <p:cNvPr id="8" name="TextBox 7"/>
-          <p:cNvSpPr txBox="1"/>
-          <p:nvPr/>
-        </p:nvSpPr>
-        <p:spPr>
-          <a:xfrm>
-            <a:off x="548640" y="4480560"/>
-            <a:ext cx="10972800" cy="2103120"/>
-          </a:xfrm>
-          <a:prstGeom prst="rect">
-            <a:avLst/>
-          </a:prstGeom>
-          <a:noFill/>
-        </p:spPr>
-        <p:txBody>
           <a:bodyPr wrap="square">
             <a:spAutoFit/>
           </a:bodyPr>
           <a:lstStyle/>
           <a:p>
             <a:pPr>
-              <a:spcAft>
-                <a:spcPts val="1000"/>
-              </a:spcAft>
-              <a:defRPr sz="1900">
-                <a:solidFill>
-                  <a:srgbClr val="1F2A44"/>
-                </a:solidFill>
-              </a:defRPr>
-            </a:pPr>
-            <a:r>
-              <a:t>Занятие неизменяемо: readonly в типах и Object.freeze во время работы</a:t>
-            </a:r>
-          </a:p>
-          <a:p>
-            <a:pPr>
-              <a:spcAft>
-                <a:spcPts val="1000"/>
-              </a:spcAft>
-              <a:defRPr sz="1900">
-                <a:solidFill>
-                  <a:srgbClr val="1F2A44"/>
-                </a:solidFill>
-              </a:defRPr>
-            </a:pPr>
-            <a:r>
-              <a:t>Правка возвращает новую версию, старая остаётся прежней (проверено тестом)</a:t>
-            </a:r>
-          </a:p>
-          <a:p>
-            <a:pPr>
-              <a:spcAft>
-                <a:spcPts val="1000"/>
-              </a:spcAft>
-              <a:defRPr sz="1900">
-                <a:solidFill>
-                  <a:srgbClr val="1F2A44"/>
-                </a:solidFill>
-              </a:defRPr>
-            </a:pPr>
-            <a:r>
-              <a:t>Один список занятий в School вместо четырёх копий; ссылки на объекты заменены id</a:t>
-            </a:r>
-          </a:p>
-        </p:txBody>
-      </p:sp>
-    </p:spTree>
-  </p:cSld>
-  <p:clrMapOvr>
-    <a:masterClrMapping/>
-  </p:clrMapOvr>
-</p:sld>
-</file>
-
-<file path=ppt/slides/slide8.xml><?xml version="1.0" encoding="utf-8"?>
-<p:sld xmlns:a="http://schemas.openxmlformats.org/drawingml/2006/main" xmlns:p="http://schemas.openxmlformats.org/presentationml/2006/main" xmlns:r="http://schemas.openxmlformats.org/officeDocument/2006/relationships">
-  <p:cSld>
-    <p:bg>
-      <p:bgPr>
-        <a:solidFill>
-          <a:srgbClr val="F5F1E8"/>
-        </a:solidFill>
-        <a:effectLst/>
-      </p:bgPr>
-    </p:bg>
-    <p:spTree>
-      <p:nvGrpSpPr>
-        <p:cNvPr id="1" name=""/>
-        <p:cNvGrpSpPr/>
-        <p:nvPr/>
-      </p:nvGrpSpPr>
-      <p:grpSpPr/>
-      <p:sp>
-        <p:nvSpPr>
-          <p:cNvPr id="2" name="TextBox 1"/>
-          <p:cNvSpPr txBox="1"/>
-          <p:nvPr/>
-        </p:nvSpPr>
-        <p:spPr>
-          <a:xfrm>
-            <a:off x="548640" y="320040"/>
-            <a:ext cx="10972800" cy="914400"/>
-          </a:xfrm>
-          <a:prstGeom prst="rect">
-            <a:avLst/>
-          </a:prstGeom>
-          <a:noFill/>
-        </p:spPr>
-        <p:txBody>
-          <a:bodyPr wrap="square">
-            <a:spAutoFit/>
-          </a:bodyPr>
-          <a:lstStyle/>
-          <a:p>
-            <a:pPr>
-              <a:defRPr sz="3200" b="1">
-                <a:solidFill>
-                  <a:srgbClr val="1F2A44"/>
-                </a:solidFill>
-              </a:defRPr>
-            </a:pPr>
-            <a:r>
-              <a:t>Сигнатуры, конструктор, обобщение</a:t>
-            </a:r>
-          </a:p>
-        </p:txBody>
-      </p:sp>
-      <p:sp>
-        <p:nvSpPr>
-          <p:cNvPr id="3" name="Rectangle 2"/>
-          <p:cNvSpPr/>
-          <p:nvPr/>
-        </p:nvSpPr>
-        <p:spPr>
-          <a:xfrm>
-            <a:off x="548640" y="1188720"/>
-            <a:ext cx="1097280" cy="64008"/>
-          </a:xfrm>
-          <a:prstGeom prst="rect">
-            <a:avLst/>
-          </a:prstGeom>
-          <a:solidFill>
-            <a:srgbClr val="C99A2E"/>
-          </a:solidFill>
-          <a:ln>
-            <a:noFill/>
-          </a:ln>
-        </p:spPr>
-        <p:style>
-          <a:lnRef idx="1">
-            <a:schemeClr val="accent1"/>
-          </a:lnRef>
-          <a:fillRef idx="3">
-            <a:schemeClr val="accent1"/>
-          </a:fillRef>
-          <a:effectRef idx="2">
-            <a:schemeClr val="accent1"/>
-          </a:effectRef>
-          <a:fontRef idx="minor">
-            <a:schemeClr val="lt1"/>
-          </a:fontRef>
-        </p:style>
-        <p:txBody>
-          <a:bodyPr rtlCol="0" anchor="ctr"/>
-          <a:lstStyle/>
-          <a:p>
-            <a:pPr algn="ctr"/>
-          </a:p>
-        </p:txBody>
-      </p:sp>
-      <p:sp>
-        <p:nvSpPr>
-          <p:cNvPr id="4" name="TextBox 3"/>
-          <p:cNvSpPr txBox="1"/>
-          <p:nvPr/>
-        </p:nvSpPr>
-        <p:spPr>
-          <a:xfrm>
-            <a:off x="548640" y="1417320"/>
-            <a:ext cx="5394960" cy="365760"/>
-          </a:xfrm>
-          <a:prstGeom prst="rect">
-            <a:avLst/>
-          </a:prstGeom>
-          <a:noFill/>
-        </p:spPr>
-        <p:txBody>
-          <a:bodyPr wrap="none">
-            <a:spAutoFit/>
-          </a:bodyPr>
-          <a:lstStyle/>
-          <a:p>
-            <a:pPr>
-              <a:defRPr sz="1800" b="1">
-                <a:solidFill>
-                  <a:srgbClr val="B03A2E"/>
-                </a:solidFill>
-              </a:defRPr>
-            </a:pPr>
-            <a:r>
-              <a:t>Было: 10 позиционных аргументов</a:t>
-            </a:r>
-          </a:p>
-        </p:txBody>
-      </p:sp>
-      <p:sp>
-        <p:nvSpPr>
-          <p:cNvPr id="5" name="Rectangle 4"/>
-          <p:cNvSpPr/>
-          <p:nvPr/>
-        </p:nvSpPr>
-        <p:spPr>
-          <a:xfrm>
-            <a:off x="548640" y="1828800"/>
-            <a:ext cx="5394960" cy="1097280"/>
-          </a:xfrm>
-          <a:prstGeom prst="rect">
-            <a:avLst/>
-          </a:prstGeom>
-          <a:solidFill>
-            <a:srgbClr val="FFFFFF"/>
-          </a:solidFill>
-          <a:ln w="19050">
-            <a:solidFill>
-              <a:srgbClr val="B03A2E"/>
-            </a:solidFill>
-          </a:ln>
-        </p:spPr>
-        <p:style>
-          <a:lnRef idx="1">
-            <a:schemeClr val="accent1"/>
-          </a:lnRef>
-          <a:fillRef idx="3">
-            <a:schemeClr val="accent1"/>
-          </a:fillRef>
-          <a:effectRef idx="2">
-            <a:schemeClr val="accent1"/>
-          </a:effectRef>
-          <a:fontRef idx="minor">
-            <a:schemeClr val="lt1"/>
-          </a:fontRef>
-        </p:style>
-        <p:txBody>
-          <a:bodyPr rtlCol="0" anchor="ctr" wrap="square" lIns="137160" rIns="137160" tIns="91440"/>
-          <a:lstStyle/>
-          <a:p>
-            <a:pPr algn="l">
-              <a:defRPr sz="1400">
-                <a:solidFill>
-                  <a:srgbClr val="222222"/>
-                </a:solidFill>
-                <a:latin typeface="Consolas"/>
-              </a:defRPr>
-            </a:pPr>
-            <a:r>
-              <a:t>new Lesson(id, teacher, student, group,</a:t>
-            </a:r>
-          </a:p>
-          <a:p>
-            <a:pPr algn="l">
-              <a:defRPr sz="1400">
-                <a:solidFill>
-                  <a:srgbClr val="222222"/>
-                </a:solidFill>
-                <a:latin typeface="Consolas"/>
-              </a:defRPr>
-            </a:pPr>
-            <a:r>
-              <a:t>  date, start, end, format, subject, topic)</a:t>
-            </a:r>
-          </a:p>
-        </p:txBody>
-      </p:sp>
-      <p:sp>
-        <p:nvSpPr>
-          <p:cNvPr id="6" name="TextBox 5"/>
-          <p:cNvSpPr txBox="1"/>
-          <p:nvPr/>
-        </p:nvSpPr>
-        <p:spPr>
-          <a:xfrm>
-            <a:off x="6217920" y="1417320"/>
-            <a:ext cx="5486400" cy="365760"/>
-          </a:xfrm>
-          <a:prstGeom prst="rect">
-            <a:avLst/>
-          </a:prstGeom>
-          <a:noFill/>
-        </p:spPr>
-        <p:txBody>
-          <a:bodyPr wrap="none">
-            <a:spAutoFit/>
-          </a:bodyPr>
-          <a:lstStyle/>
-          <a:p>
-            <a:pPr>
-              <a:defRPr sz="1800" b="1">
-                <a:solidFill>
-                  <a:srgbClr val="2E7D4F"/>
-                </a:solidFill>
-              </a:defRPr>
-            </a:pPr>
-            <a:r>
-              <a:t>Стало: один объект с именами</a:t>
-            </a:r>
-          </a:p>
-        </p:txBody>
-      </p:sp>
-      <p:sp>
-        <p:nvSpPr>
-          <p:cNvPr id="7" name="Rectangle 6"/>
-          <p:cNvSpPr/>
-          <p:nvPr/>
-        </p:nvSpPr>
-        <p:spPr>
-          <a:xfrm>
-            <a:off x="6217920" y="1828800"/>
-            <a:ext cx="5486400" cy="1280160"/>
-          </a:xfrm>
-          <a:prstGeom prst="rect">
-            <a:avLst/>
-          </a:prstGeom>
-          <a:solidFill>
-            <a:srgbClr val="FFFFFF"/>
-          </a:solidFill>
-          <a:ln w="19050">
-            <a:solidFill>
-              <a:srgbClr val="2E7D4F"/>
-            </a:solidFill>
-          </a:ln>
-        </p:spPr>
-        <p:style>
-          <a:lnRef idx="1">
-            <a:schemeClr val="accent1"/>
-          </a:lnRef>
-          <a:fillRef idx="3">
-            <a:schemeClr val="accent1"/>
-          </a:fillRef>
-          <a:effectRef idx="2">
-            <a:schemeClr val="accent1"/>
-          </a:effectRef>
-          <a:fontRef idx="minor">
-            <a:schemeClr val="lt1"/>
-          </a:fontRef>
-        </p:style>
-        <p:txBody>
-          <a:bodyPr rtlCol="0" anchor="ctr" wrap="square" lIns="137160" rIns="137160" tIns="91440"/>
-          <a:lstStyle/>
-          <a:p>
-            <a:pPr algn="l">
-              <a:defRPr sz="1400">
-                <a:solidFill>
-                  <a:srgbClr val="222222"/>
-                </a:solidFill>
-                <a:latin typeface="Consolas"/>
-              </a:defRPr>
-            </a:pPr>
-            <a:r>
-              <a:t>createLesson(id, {</a:t>
-            </a:r>
-          </a:p>
-          <a:p>
-            <a:pPr algn="l">
-              <a:defRPr sz="1400">
-                <a:solidFill>
-                  <a:srgbClr val="222222"/>
-                </a:solidFill>
-                <a:latin typeface="Consolas"/>
-              </a:defRPr>
-            </a:pPr>
-            <a:r>
-              <a:t>  teacherId, studentId, date,</a:t>
-            </a:r>
-          </a:p>
-          <a:p>
-            <a:pPr algn="l">
-              <a:defRPr sz="1400">
-                <a:solidFill>
-                  <a:srgbClr val="222222"/>
-                </a:solidFill>
-                <a:latin typeface="Consolas"/>
-              </a:defRPr>
-            </a:pPr>
-            <a:r>
-              <a:t>  startTime, endTime, format, subject })</a:t>
-            </a:r>
-          </a:p>
-        </p:txBody>
-      </p:sp>
-      <p:sp>
-        <p:nvSpPr>
-          <p:cNvPr id="8" name="TextBox 7"/>
-          <p:cNvSpPr txBox="1"/>
-          <p:nvPr/>
-        </p:nvSpPr>
-        <p:spPr>
-          <a:xfrm>
-            <a:off x="548640" y="3520439"/>
-            <a:ext cx="11155680" cy="365760"/>
-          </a:xfrm>
-          <a:prstGeom prst="rect">
-            <a:avLst/>
-          </a:prstGeom>
-          <a:noFill/>
-        </p:spPr>
-        <p:txBody>
-          <a:bodyPr wrap="none">
-            <a:spAutoFit/>
-          </a:bodyPr>
-          <a:lstStyle/>
-          <a:p>
-            <a:pPr>
-              <a:defRPr sz="1800" b="1">
-                <a:solidFill>
-                  <a:srgbClr val="2E7D4F"/>
-                </a:solidFill>
-              </a:defRPr>
-            </a:pPr>
-            <a:r>
-              <a:t>Обобщение: любая правка занятия это функция «было → стало»</a:t>
-            </a:r>
-          </a:p>
-        </p:txBody>
-      </p:sp>
-      <p:sp>
-        <p:nvSpPr>
-          <p:cNvPr id="9" name="Rectangle 8"/>
-          <p:cNvSpPr/>
-          <p:nvPr/>
-        </p:nvSpPr>
-        <p:spPr>
-          <a:xfrm>
-            <a:off x="548640" y="3931920"/>
-            <a:ext cx="11155680" cy="1645920"/>
-          </a:xfrm>
-          <a:prstGeom prst="rect">
-            <a:avLst/>
-          </a:prstGeom>
-          <a:solidFill>
-            <a:srgbClr val="FFFFFF"/>
-          </a:solidFill>
-          <a:ln w="19050">
-            <a:solidFill>
-              <a:srgbClr val="2E7D4F"/>
-            </a:solidFill>
-          </a:ln>
-        </p:spPr>
-        <p:style>
-          <a:lnRef idx="1">
-            <a:schemeClr val="accent1"/>
-          </a:lnRef>
-          <a:fillRef idx="3">
-            <a:schemeClr val="accent1"/>
-          </a:fillRef>
-          <a:effectRef idx="2">
-            <a:schemeClr val="accent1"/>
-          </a:effectRef>
-          <a:fontRef idx="minor">
-            <a:schemeClr val="lt1"/>
-          </a:fontRef>
-        </p:style>
-        <p:txBody>
-          <a:bodyPr rtlCol="0" anchor="ctr" wrap="square" lIns="137160" rIns="137160" tIns="91440"/>
-          <a:lstStyle/>
-          <a:p>
-            <a:pPr algn="l">
-              <a:defRPr sz="1400">
-                <a:solidFill>
-                  <a:srgbClr val="222222"/>
-                </a:solidFill>
-                <a:latin typeface="Consolas"/>
-              </a:defRPr>
-            </a:pPr>
-            <a:r>
-              <a:t>cancelLesson(id)  { return this.change(id, ops.cancel); }</a:t>
-            </a:r>
-          </a:p>
-          <a:p>
-            <a:pPr algn="l">
-              <a:defRPr sz="1400">
-                <a:solidFill>
-                  <a:srgbClr val="222222"/>
-                </a:solidFill>
-                <a:latin typeface="Consolas"/>
-              </a:defRPr>
-            </a:pPr>
-            <a:r>
-              <a:t>conductLesson(id) { return this.change(id, ops.conduct); }</a:t>
-            </a:r>
-          </a:p>
-          <a:p>
-            <a:pPr algn="l">
-              <a:defRPr sz="1400">
-                <a:solidFill>
-                  <a:srgbClr val="222222"/>
-                </a:solidFill>
-                <a:latin typeface="Consolas"/>
-              </a:defRPr>
-            </a:pPr>
-            <a:r>
-              <a:t>private change(id, edit: (l) =&gt; Lesson) {</a:t>
-            </a:r>
-          </a:p>
-          <a:p>
-            <a:pPr algn="l">
-              <a:defRPr sz="1400">
-                <a:solidFill>
-                  <a:srgbClr val="222222"/>
-                </a:solidFill>
-                <a:latin typeface="Consolas"/>
-              </a:defRPr>
-            </a:pPr>
-            <a:r>
-              <a:t>  return this.apply(edit(this.lesson(id)));</a:t>
-            </a:r>
-          </a:p>
-          <a:p>
-            <a:pPr algn="l">
-              <a:defRPr sz="1400">
-                <a:solidFill>
-                  <a:srgbClr val="222222"/>
-                </a:solidFill>
-                <a:latin typeface="Consolas"/>
-              </a:defRPr>
-            </a:pPr>
-            <a:r>
-              <a:t>}</a:t>
-            </a:r>
-          </a:p>
-        </p:txBody>
-      </p:sp>
-      <p:sp>
-        <p:nvSpPr>
-          <p:cNvPr id="10" name="TextBox 9"/>
-          <p:cNvSpPr txBox="1"/>
-          <p:nvPr/>
-        </p:nvSpPr>
-        <p:spPr>
-          <a:xfrm>
-            <a:off x="548640" y="5852160"/>
-            <a:ext cx="10972800" cy="731520"/>
-          </a:xfrm>
-          <a:prstGeom prst="rect">
-            <a:avLst/>
-          </a:prstGeom>
-          <a:noFill/>
-        </p:spPr>
-        <p:txBody>
-          <a:bodyPr wrap="square">
-            <a:spAutoFit/>
-          </a:bodyPr>
-          <a:lstStyle/>
-          <a:p>
-            <a:pPr>
-              <a:spcAft>
-                <a:spcPts val="1000"/>
-              </a:spcAft>
-              <a:defRPr sz="1800">
-                <a:solidFill>
-                  <a:srgbClr val="1F2A44"/>
-                </a:solidFill>
+              <a:defRPr sz="1800" b="0">
+                <a:solidFill>
+                  <a:srgbClr val="222222"/>
+                </a:solidFill>
+                <a:latin typeface="Calibri"/>
               </a:defRPr>
             </a:pPr>
             <a:r>
@@ -7195,14 +7236,6 @@
 <file path=ppt/slides/slide9.xml><?xml version="1.0" encoding="utf-8"?>
 <p:sld xmlns:a="http://schemas.openxmlformats.org/drawingml/2006/main" xmlns:p="http://schemas.openxmlformats.org/presentationml/2006/main" xmlns:r="http://schemas.openxmlformats.org/officeDocument/2006/relationships">
   <p:cSld>
-    <p:bg>
-      <p:bgPr>
-        <a:solidFill>
-          <a:srgbClr val="F5F1E8"/>
-        </a:solidFill>
-        <a:effectLst/>
-      </p:bgPr>
-    </p:bg>
     <p:spTree>
       <p:nvGrpSpPr>
         <p:cNvPr id="1" name=""/>
@@ -7218,8 +7251,8 @@
         </p:nvSpPr>
         <p:spPr>
           <a:xfrm>
-            <a:off x="548640" y="320040"/>
-            <a:ext cx="10972800" cy="914400"/>
+            <a:off x="640080" y="365760"/>
+            <a:ext cx="10972800" cy="822960"/>
           </a:xfrm>
           <a:prstGeom prst="rect">
             <a:avLst/>
@@ -7235,8 +7268,9 @@
             <a:pPr>
               <a:defRPr sz="3200" b="1">
                 <a:solidFill>
-                  <a:srgbClr val="1F2A44"/>
-                </a:solidFill>
+                  <a:srgbClr val="222222"/>
+                </a:solidFill>
+                <a:latin typeface="Calibri"/>
               </a:defRPr>
             </a:pPr>
             <a:r>
@@ -7247,57 +7281,14 @@
       </p:sp>
       <p:sp>
         <p:nvSpPr>
-          <p:cNvPr id="3" name="Rectangle 2"/>
-          <p:cNvSpPr/>
-          <p:nvPr/>
-        </p:nvSpPr>
-        <p:spPr>
-          <a:xfrm>
-            <a:off x="548640" y="1188720"/>
-            <a:ext cx="1097280" cy="64008"/>
-          </a:xfrm>
-          <a:prstGeom prst="rect">
-            <a:avLst/>
-          </a:prstGeom>
-          <a:solidFill>
-            <a:srgbClr val="C99A2E"/>
-          </a:solidFill>
-          <a:ln>
-            <a:noFill/>
-          </a:ln>
-        </p:spPr>
-        <p:style>
-          <a:lnRef idx="1">
-            <a:schemeClr val="accent1"/>
-          </a:lnRef>
-          <a:fillRef idx="3">
-            <a:schemeClr val="accent1"/>
-          </a:fillRef>
-          <a:effectRef idx="2">
-            <a:schemeClr val="accent1"/>
-          </a:effectRef>
-          <a:fontRef idx="minor">
-            <a:schemeClr val="lt1"/>
-          </a:fontRef>
-        </p:style>
-        <p:txBody>
-          <a:bodyPr rtlCol="0" anchor="ctr"/>
-          <a:lstStyle/>
-          <a:p>
-            <a:pPr algn="ctr"/>
-          </a:p>
-        </p:txBody>
-      </p:sp>
-      <p:sp>
-        <p:nvSpPr>
-          <p:cNvPr id="4" name="TextBox 3"/>
+          <p:cNvPr id="3" name="TextBox 2"/>
           <p:cNvSpPr txBox="1"/>
           <p:nvPr/>
         </p:nvSpPr>
         <p:spPr>
           <a:xfrm>
-            <a:off x="548640" y="1554480"/>
-            <a:ext cx="10972800" cy="4572000"/>
+            <a:off x="11155680" y="6355080"/>
+            <a:ext cx="731520" cy="365760"/>
           </a:xfrm>
           <a:prstGeom prst="rect">
             <a:avLst/>
@@ -7311,77 +7302,118 @@
           <a:lstStyle/>
           <a:p>
             <a:pPr>
+              <a:defRPr sz="1200" b="0">
+                <a:solidFill>
+                  <a:srgbClr val="666666"/>
+                </a:solidFill>
+                <a:latin typeface="Calibri"/>
+              </a:defRPr>
+            </a:pPr>
+            <a:r>
+              <a:t>9</a:t>
+            </a:r>
+          </a:p>
+        </p:txBody>
+      </p:sp>
+      <p:sp>
+        <p:nvSpPr>
+          <p:cNvPr id="4" name="TextBox 3"/>
+          <p:cNvSpPr txBox="1"/>
+          <p:nvPr/>
+        </p:nvSpPr>
+        <p:spPr>
+          <a:xfrm>
+            <a:off x="640080" y="1463040"/>
+            <a:ext cx="10881360" cy="4572000"/>
+          </a:xfrm>
+          <a:prstGeom prst="rect">
+            <a:avLst/>
+          </a:prstGeom>
+          <a:noFill/>
+        </p:spPr>
+        <p:txBody>
+          <a:bodyPr wrap="square">
+            <a:spAutoFit/>
+          </a:bodyPr>
+          <a:lstStyle/>
+          <a:p>
+            <a:pPr>
               <a:spcAft>
-                <a:spcPts val="1000"/>
+                <a:spcPts val="1200"/>
               </a:spcAft>
               <a:defRPr sz="2000">
                 <a:solidFill>
-                  <a:srgbClr val="1F2A44"/>
-                </a:solidFill>
-              </a:defRPr>
-            </a:pPr>
-            <a:r>
-              <a:t>Вычисления: проверяются одним вызовом, не зависят от состояния школы, их можно использовать повторно</a:t>
+                  <a:srgbClr val="222222"/>
+                </a:solidFill>
+                <a:latin typeface="Calibri"/>
+              </a:defRPr>
+            </a:pPr>
+            <a:r>
+              <a:t>• Вычисления проверяются одним вызовом, не зависят от состояния школы, их можно использовать повторно</a:t>
             </a:r>
           </a:p>
           <a:p>
             <a:pPr>
               <a:spcAft>
-                <a:spcPts val="1000"/>
+                <a:spcPts val="1200"/>
               </a:spcAft>
               <a:defRPr sz="2000">
                 <a:solidFill>
-                  <a:srgbClr val="1F2A44"/>
-                </a:solidFill>
-              </a:defRPr>
-            </a:pPr>
-            <a:r>
-              <a:t>Неизменяемость: нельзя случайно испортить данные, которые держит кто-то другой; видно, где состояние меняется (одна точка в School)</a:t>
+                  <a:srgbClr val="222222"/>
+                </a:solidFill>
+                <a:latin typeface="Calibri"/>
+              </a:defRPr>
+            </a:pPr>
+            <a:r>
+              <a:t>• Неизменяемость: нельзя случайно испортить данные, которые держит кто-то другой; состояние меняется в одном месте (School)</a:t>
             </a:r>
           </a:p>
           <a:p>
             <a:pPr>
               <a:spcAft>
-                <a:spcPts val="1000"/>
+                <a:spcPts val="1200"/>
               </a:spcAft>
               <a:defRPr sz="2000">
                 <a:solidFill>
-                  <a:srgbClr val="1F2A44"/>
-                </a:solidFill>
-              </a:defRPr>
-            </a:pPr>
-            <a:r>
-              <a:t>Скрытые выходы убраны: сводка по школе больше не печатает отчёты преподавателей попутно</a:t>
+                  <a:srgbClr val="222222"/>
+                </a:solidFill>
+                <a:latin typeface="Calibri"/>
+              </a:defRPr>
+            </a:pPr>
+            <a:r>
+              <a:t>• Скрытые выходы убраны: сводка по школе больше не печатает отчёты преподавателей попутно</a:t>
             </a:r>
           </a:p>
           <a:p>
             <a:pPr>
               <a:spcAft>
-                <a:spcPts val="1000"/>
+                <a:spcPts val="1200"/>
               </a:spcAft>
               <a:defRPr sz="2000">
                 <a:solidFill>
-                  <a:srgbClr val="1F2A44"/>
-                </a:solidFill>
-              </a:defRPr>
-            </a:pPr>
-            <a:r>
-              <a:t>Вывод демо-сценария совпал с исходным, кроме этих двух строк (сверено)</a:t>
+                  <a:srgbClr val="222222"/>
+                </a:solidFill>
+                <a:latin typeface="Calibri"/>
+              </a:defRPr>
+            </a:pPr>
+            <a:r>
+              <a:t>• Вывод демо совпал с исходным, кроме этих двух строк (сверено)</a:t>
             </a:r>
           </a:p>
           <a:p>
             <a:pPr>
               <a:spcAft>
-                <a:spcPts val="1000"/>
+                <a:spcPts val="1200"/>
               </a:spcAft>
               <a:defRPr sz="2000">
                 <a:solidFill>
-                  <a:srgbClr val="1F2A44"/>
-                </a:solidFill>
-              </a:defRPr>
-            </a:pPr>
-            <a:r>
-              <a:t>Тесты: 8 до рефакторинга, 19 после; репозиторий: 3 коммита по этапам</a:t>
+                  <a:srgbClr val="222222"/>
+                </a:solidFill>
+                <a:latin typeface="Calibri"/>
+              </a:defRPr>
+            </a:pPr>
+            <a:r>
+              <a:t>• Тесты: 8 до рефакторинга, 19 после; в репозитории 3 коммита по этапам</a:t>
             </a:r>
           </a:p>
         </p:txBody>
